--- a/10-Knowledge-Products/KP1-GEA/videos/module_3/en/decks/KP1_M3_3.1_Deck_v0.2.pptx
+++ b/10-Knowledge-Products/KP1-GEA/videos/module_3/en/decks/KP1_M3_3.1_Deck_v0.2.pptx
@@ -14,7 +14,6 @@
     <p:handoutMasterId r:id="rId47"/>
   </p:handoutMasterIdLst>
   <p:sldIdLst>
-    <p:sldId id="2681" r:id="rId8"/>
     <p:sldId id="2696" r:id="rId18"/>
     <p:sldId id="2697" r:id="rId19"/>
     <p:sldId id="2698" r:id="rId20"/>
@@ -23,6 +22,7 @@
     <p:sldId id="2701" r:id="rId23"/>
     <p:sldId id="2702" r:id="rId24"/>
     <p:sldId id="2703" r:id="rId25"/>
+    <p:sldId id="2704" r:id="rId26"/>
   </p:sldIdLst>
   <p:sldSz cx="12192000" cy="6858000"/>
   <p:notesSz cx="6858000" cy="9144000"/>
@@ -934,7 +934,13 @@
           <a:lstStyle/>
           <a:p>
             <a:r>
-              <a:t>Sources slide, held ~5 seconds at the end of the video. Links are compiled into the YouTube description per ITU convention; no URLs read aloud.</a:t>
+              <a:t>PRACTICE BOX (on-screen only — never read it, never paraphrase it, never point at it). It replaces the narrated handoff: this video ends on the recap and the Sources slide.</a:t>
+            </a:r>
+          </a:p>
+          <a:p/>
+          <a:p>
+            <a:r>
+              <a:t>VO: So before tooling, before governance, set up the one place — the single store of the layers, the relationships and the decisions. Let copies multiply, and no amount of governance will save the architecture.</a:t>
             </a:r>
           </a:p>
         </p:txBody>
@@ -959,7 +965,7 @@
 </p:notes>
 </file>
 
-<file path=ppt/notesSlides/notesSlide21.xml><?xml version="1.0" encoding="utf-8"?>
+<file path=ppt/notesSlides/notesSlide11.xml><?xml version="1.0" encoding="utf-8"?>
 <p:notes xmlns:a="http://schemas.openxmlformats.org/drawingml/2006/main" xmlns:p="http://schemas.openxmlformats.org/presentationml/2006/main" xmlns:r="http://schemas.openxmlformats.org/officeDocument/2006/relationships">
   <p:cSld>
     <p:spTree>
@@ -1004,7 +1010,7 @@
           <a:lstStyle/>
           <a:p>
             <a:r>
-              <a:t>Title card for standalone video 3.1. Content slides are identical to the corresponding section of the combined deck KP1_M3_Deck_v0.2.pptx; voice-over is in each slide’s notes.</a:t>
+              <a:t>Sources slide, held ~5 seconds at the end of the video. Links are compiled into the YouTube description per ITU convention; no URLs read aloud.</a:t>
             </a:r>
           </a:p>
         </p:txBody>
@@ -1074,7 +1080,7 @@
           <a:lstStyle/>
           <a:p>
             <a:r>
-              <a:t>VO, slide 1: You have the four-layer picture of a sector. Where does it live? If the answer is a slide deck on your laptop, the architecture will be out of date within a month and disagreed with within two. It needs a home: the repository.</a:t>
+              <a:t>Title card — the cold open. The hosts name the module, the video number, the title and the single message on this slide; no scripted narration. Hold until the opener begins; the opener is narrated on the next slide.</a:t>
             </a:r>
           </a:p>
         </p:txBody>
@@ -1144,7 +1150,7 @@
           <a:lstStyle/>
           <a:p>
             <a:r>
-              <a:t>VO: A repository is not a building, and it is not a particular software product. It is the single, agreed store of your architecture. It holds three things. The four layers — the capabilities, data domains, applications and technology you mapped. The relationships — how they connect, using the shared entities. And the decisions — what the EA Board ruled, and why. One place. One version everyone trusts.</a:t>
+              <a:t>VO: You have the four-layer picture of a sector. Where does it live? If the answer is a slide deck on your laptop, the architecture will be out of date within a month and disagreed with within two. It needs a home: the repository.</a:t>
             </a:r>
           </a:p>
         </p:txBody>
@@ -1214,7 +1220,7 @@
           <a:lstStyle/>
           <a:p>
             <a:r>
-              <a:t>VO: Why insist on one place? Because the moment there are two copies, they drift, and then they disagree. One ministry works from last year's picture; another from a newer one. People stop arguing about the architecture and start arguing about whose copy is right. A second copy does not add a backup — it destroys the single source of truth. One place, or effectively none.</a:t>
+              <a:t>VO: A repository is not a building, and it is not a particular software product. It is the single, agreed store of your architecture. It holds three things. The four layers — the capabilities, data domains, applications and technology you mapped. The relationships — how they connect, using the shared entities. And the decisions — what the EA Board ruled, and why. One place. One version everyone trusts.</a:t>
             </a:r>
           </a:p>
         </p:txBody>
@@ -1284,13 +1290,7 @@
           <a:lstStyle/>
           <a:p>
             <a:r>
-              <a:t>VO: Concretely, take Progressa's education sector. The repository holds the data domains and their owners — Person owned by the Identity Authority, Learner by the Learner Registry, examination results by the Examination Authority. It holds the capability map, the application portfolio, the shared technology. And it holds the decisions: when the Board ruled that the Examination Authority must consume the Learner Registry rather than keep its own list, that ruling lives in the repository, with its reason. Anyone can look up not just what the architecture is, but why it is that way.</a:t>
-            </a:r>
-          </a:p>
-          <a:p/>
-          <a:p>
-            <a:r>
-              <a:t>On screen: Progressa is a fictional demonstration country; institution names are plain-text labels, no emblems.</a:t>
+              <a:t>VO: Why insist on one place? Because the moment there are two copies, they drift, and then they disagree. One ministry works from last year's picture; another from a newer one. People stop arguing about the architecture and start arguing about whose copy is right. A second copy does not add a backup — it destroys the single source of truth. One place, or effectively none.</a:t>
             </a:r>
           </a:p>
         </p:txBody>
@@ -1360,7 +1360,13 @@
           <a:lstStyle/>
           <a:p>
             <a:r>
-              <a:t>VO: You do not need to buy anything to start. A well-structured spreadsheet, or a shared wiki, is a real repository if it holds the four layers, the relationships and the decisions, and if everyone uses it as the one source. Structure matters more than software. Many countries run a perfectly good early EA on a spreadsheet and a document store. The discipline of one place is what counts — not the price of the tool. When a spreadsheet starts to hurt, you graduate to a dedicated tool; the choice of tool is its own deliberate decision.</a:t>
+              <a:t>VO: Concretely, take Progressa's education sector. The repository holds the data domains and their owners — Person owned by the Identity Authority, Learner by the Learner Registry, examination results by the Examination Authority. It holds the capability map, the application portfolio, the shared technology. And it holds the decisions: when the Board ruled that the Examination Authority must consume the Learner Registry rather than keep its own list, that ruling lives in the repository, with its reason. Anyone can look up not just what the architecture is, but why it is that way.</a:t>
+            </a:r>
+          </a:p>
+          <a:p/>
+          <a:p>
+            <a:r>
+              <a:t>On screen: Progressa is a fictional demonstration country; institution names are plain-text labels, no emblems.</a:t>
             </a:r>
           </a:p>
         </p:txBody>
@@ -1430,7 +1436,7 @@
           <a:lstStyle/>
           <a:p>
             <a:r>
-              <a:t>VO: The repository is also the object both sides point at: when the minister briefs cabinet and the architect designs a system they are looking at the same picture, which is what makes the architecture a shared language between the business side and the IT side instead of two private ones.</a:t>
+              <a:t>VO: You do not need to buy anything to start. A well-structured spreadsheet, or a shared wiki, is a real repository if it holds the four layers, the relationships and the decisions, and if everyone uses it as the one source. Structure matters more than software. Many countries run a perfectly good early EA on a spreadsheet and a document store. The discipline of one place is what counts — not the price of the tool. When a spreadsheet starts to hurt, you graduate to a dedicated tool; the choice of tool is its own deliberate decision.</a:t>
             </a:r>
           </a:p>
         </p:txBody>
@@ -1500,13 +1506,7 @@
           <a:lstStyle/>
           <a:p>
             <a:r>
-              <a:t>PRACTICE BOX (on-screen only — never read it, never paraphrase it, never point at it). It replaces the narrated handoff: this video ends on the recap and the Sources slide.</a:t>
-            </a:r>
-          </a:p>
-          <a:p/>
-          <a:p>
-            <a:r>
-              <a:t>VO: So before tooling, before governance, set up the one place — the single store of the layers, the relationships and the decisions. Let copies multiply, and no amount of governance will save the architecture.</a:t>
+              <a:t>VO: The repository is also the object both sides point at: when the minister briefs cabinet and the architect designs a system they are looking at the same picture, which is what makes the architecture a shared language between the business side and the IT side instead of two private ones.</a:t>
             </a:r>
           </a:p>
         </p:txBody>
@@ -11667,8 +11667,8 @@
 </p:sldMaster>
 </file>
 
-<file path=ppt/slides/slide1.xml><?xml version="1.0" encoding="utf-8"?>
-<p:sld xmlns:a="http://schemas.openxmlformats.org/drawingml/2006/main" xmlns:r="http://schemas.openxmlformats.org/officeDocument/2006/relationships" xmlns:p="http://schemas.openxmlformats.org/presentationml/2006/main">
+<file path=ppt/slides/slide10.xml><?xml version="1.0" encoding="utf-8"?>
+<p:sld xmlns:a="http://schemas.openxmlformats.org/drawingml/2006/main" xmlns:p="http://schemas.openxmlformats.org/presentationml/2006/main" xmlns:r="http://schemas.openxmlformats.org/officeDocument/2006/relationships">
   <p:cSld>
     <p:spTree>
       <p:nvGrpSpPr>
@@ -11676,328 +11676,98 @@
         <p:cNvGrpSpPr/>
         <p:nvPr/>
       </p:nvGrpSpPr>
-      <p:grpSpPr>
-        <a:xfrm>
-          <a:off x="0" y="0"/>
-          <a:ext cx="0" cy="0"/>
-          <a:chOff x="0" y="0"/>
-          <a:chExt cx="0" cy="0"/>
-        </a:xfrm>
-      </p:grpSpPr>
-      <p:cxnSp>
-        <p:nvCxnSpPr>
-          <p:cNvPr id="11" name="Straight Connector 10">
-            <a:extLst>
-              <a:ext uri="{FF2B5EF4-FFF2-40B4-BE49-F238E27FC236}">
-                <a16:creationId xmlns:a16="http://schemas.microsoft.com/office/drawing/2014/main" id="{D9AD66F2-F7C0-4D03-9150-D28F17AC561D}"/>
-              </a:ext>
-            </a:extLst>
-          </p:cNvPr>
-          <p:cNvCxnSpPr>
-            <a:cxnSpLocks/>
-          </p:cNvCxnSpPr>
+      <p:grpSpPr/>
+      <p:sp>
+        <p:nvSpPr>
+          <p:cNvPr id="2" name="TextBox 1"/>
+          <p:cNvSpPr txBox="1"/>
           <p:nvPr/>
-        </p:nvCxnSpPr>
-        <p:spPr>
-          <a:xfrm>
-            <a:off x="373021" y="2198718"/>
-            <a:ext cx="6843567" cy="0"/>
-          </a:xfrm>
-          <a:prstGeom prst="line">
-            <a:avLst/>
-          </a:prstGeom>
-          <a:ln w="12700">
-            <a:solidFill>
-              <a:srgbClr val="009CD6"/>
-            </a:solidFill>
-          </a:ln>
-        </p:spPr>
-        <p:style>
-          <a:lnRef idx="1">
-            <a:schemeClr val="accent1"/>
-          </a:lnRef>
-          <a:fillRef idx="0">
-            <a:schemeClr val="accent1"/>
-          </a:fillRef>
-          <a:effectRef idx="0">
-            <a:schemeClr val="accent1"/>
-          </a:effectRef>
-          <a:fontRef idx="minor">
-            <a:schemeClr val="tx1"/>
-          </a:fontRef>
-        </p:style>
-      </p:cxnSp>
-      <p:sp>
-        <p:nvSpPr>
-          <p:cNvPr id="12" name="Title 9">
-            <a:extLst>
-              <a:ext uri="{FF2B5EF4-FFF2-40B4-BE49-F238E27FC236}">
-                <a16:creationId xmlns:a16="http://schemas.microsoft.com/office/drawing/2014/main" id="{EEB08032-CE0E-4986-AEDF-A41026C0E8B9}"/>
-              </a:ext>
-            </a:extLst>
-          </p:cNvPr>
-          <p:cNvSpPr txBox="1">
-            <a:spLocks/>
-          </p:cNvSpPr>
-          <p:nvPr/>
-        </p:nvSpPr>
-        <p:spPr>
-          <a:xfrm>
-            <a:off x="237734" y="702833"/>
-            <a:ext cx="6432007" cy="1218817"/>
+        </p:nvSpPr>
+        <p:spPr>
+          <a:xfrm>
+            <a:off x="1005840" y="2103120"/>
+            <a:ext cx="10149840" cy="2377440"/>
           </a:xfrm>
           <a:prstGeom prst="rect">
             <a:avLst/>
           </a:prstGeom>
-        </p:spPr>
-        <p:txBody>
-          <a:bodyPr anchor="b">
-            <a:noAutofit/>
+          <a:noFill/>
+        </p:spPr>
+        <p:txBody>
+          <a:bodyPr wrap="square">
+            <a:spAutoFit/>
           </a:bodyPr>
-          <a:lstStyle>
-            <a:lvl1pPr algn="l" defTabSz="914400" rtl="0" eaLnBrk="1" latinLnBrk="0" hangingPunct="1">
-              <a:lnSpc>
-                <a:spcPct val="90000"/>
-              </a:lnSpc>
-              <a:spcBef>
-                <a:spcPct val="0"/>
-              </a:spcBef>
-              <a:buNone/>
-              <a:defRPr sz="4000" kern="1200">
-                <a:solidFill>
-                  <a:schemeClr val="bg1"/>
-                </a:solidFill>
-                <a:latin typeface="Arial" panose="020B0604020202020204" pitchFamily="34" charset="0"/>
-                <a:ea typeface="+mj-ea"/>
-                <a:cs typeface="Arial" panose="020B0604020202020204" pitchFamily="34" charset="0"/>
-              </a:defRPr>
-            </a:lvl1pPr>
-          </a:lstStyle>
-          <a:p>
-            <a:r>
-              <a:rPr sz="2400" b="1" i="0">
+          <a:lstStyle/>
+          <a:p>
+            <a:r>
+              <a:rPr sz="3000" b="1" i="0">
                 <a:solidFill>
                   <a:srgbClr val="1A1A1A"/>
                 </a:solidFill>
                 <a:latin typeface="Arial"/>
               </a:rPr>
-              <a:t>3.1 — Set up the one place your architecture lives</a:t>
-            </a:r>
-          </a:p>
-        </p:txBody>
-      </p:sp>
-      <p:pic>
-        <p:nvPicPr>
-          <p:cNvPr id="7" name="Picture 6">
-            <a:extLst>
-              <a:ext uri="{FF2B5EF4-FFF2-40B4-BE49-F238E27FC236}">
-                <a16:creationId xmlns:a16="http://schemas.microsoft.com/office/drawing/2014/main" id="{A2066351-C569-4C4C-A096-308777FCDC32}"/>
-              </a:ext>
-            </a:extLst>
-          </p:cNvPr>
-          <p:cNvPicPr>
-            <a:picLocks noChangeAspect="1"/>
-          </p:cNvPicPr>
+              <a:t>An EA repository is the single agreed place your architecture lives — the layers, the relationships and the decisions — so there is one picture of your government, not many.</a:t>
+            </a:r>
+          </a:p>
+        </p:txBody>
+      </p:sp>
+      <p:sp>
+        <p:nvSpPr>
+          <p:cNvPr id="3" name="TextBox 2"/>
+          <p:cNvSpPr txBox="1"/>
           <p:nvPr/>
-        </p:nvPicPr>
-        <p:blipFill>
-          <a:blip r:embed="rId2">
-            <a:extLst>
-              <a:ext uri="{28A0092B-C50C-407E-A947-70E740481C1C}">
-                <a14:useLocalDpi xmlns:a14="http://schemas.microsoft.com/office/drawing/2010/main" val="0"/>
-              </a:ext>
-            </a:extLst>
-          </a:blip>
-          <a:srcRect t="20219" b="14729"/>
-          <a:stretch>
-            <a:fillRect/>
-          </a:stretch>
-        </p:blipFill>
-        <p:spPr>
-          <a:xfrm>
-            <a:off x="0" y="5620871"/>
-            <a:ext cx="1323975" cy="1218816"/>
+        </p:nvSpPr>
+        <p:spPr>
+          <a:xfrm>
+            <a:off x="1005840" y="1554480"/>
+            <a:ext cx="5486400" cy="365760"/>
           </a:xfrm>
           <a:prstGeom prst="rect">
             <a:avLst/>
           </a:prstGeom>
-        </p:spPr>
-      </p:pic>
-      <p:sp>
-        <p:nvSpPr>
-          <p:cNvPr id="14" name="Title 9">
-            <a:extLst>
-              <a:ext uri="{FF2B5EF4-FFF2-40B4-BE49-F238E27FC236}">
-                <a16:creationId xmlns:a16="http://schemas.microsoft.com/office/drawing/2014/main" id="{B5087B80-3EE4-1881-0130-ED58CA625092}"/>
-              </a:ext>
-            </a:extLst>
-          </p:cNvPr>
-          <p:cNvSpPr txBox="1">
-            <a:spLocks/>
-          </p:cNvSpPr>
-          <p:nvPr/>
-        </p:nvSpPr>
-        <p:spPr>
-          <a:xfrm>
-            <a:off x="284452" y="2475786"/>
-            <a:ext cx="6382893" cy="953213"/>
-          </a:xfrm>
-          <a:prstGeom prst="rect">
-            <a:avLst/>
-          </a:prstGeom>
-        </p:spPr>
-        <p:txBody>
-          <a:bodyPr anchor="t">
-            <a:noAutofit/>
+          <a:noFill/>
+        </p:spPr>
+        <p:txBody>
+          <a:bodyPr wrap="square">
+            <a:spAutoFit/>
           </a:bodyPr>
-          <a:lstStyle>
-            <a:lvl1pPr algn="l" defTabSz="914400" rtl="0" eaLnBrk="1" latinLnBrk="0" hangingPunct="1">
-              <a:lnSpc>
-                <a:spcPct val="90000"/>
-              </a:lnSpc>
-              <a:spcBef>
-                <a:spcPct val="0"/>
-              </a:spcBef>
-              <a:buNone/>
-              <a:defRPr sz="4000" kern="1200">
-                <a:solidFill>
-                  <a:schemeClr val="bg1"/>
-                </a:solidFill>
-                <a:latin typeface="Arial" panose="020B0604020202020204" pitchFamily="34" charset="0"/>
-                <a:ea typeface="+mj-ea"/>
-                <a:cs typeface="Arial" panose="020B0604020202020204" pitchFamily="34" charset="0"/>
-              </a:defRPr>
-            </a:lvl1pPr>
-          </a:lstStyle>
-          <a:p>
-            <a:pPr marL="0" marR="0" lvl="0" indent="0" rtl="0">
-              <a:spcBef>
-                <a:spcPts val="600"/>
-              </a:spcBef>
-              <a:spcAft>
-                <a:spcPts val="0"/>
-              </a:spcAft>
-              <a:buNone/>
-            </a:pPr>
-            <a:r>
-              <a:rPr sz="1300" b="1" i="0">
+          <a:lstStyle/>
+          <a:p>
+            <a:r>
+              <a:rPr sz="1200" b="1" i="0">
                 <a:solidFill>
                   <a:srgbClr val="006E96"/>
                 </a:solidFill>
                 <a:latin typeface="Arial"/>
               </a:rPr>
-              <a:t>KP1 · Government Enterprise Architecture · Module 3 · Video 3.1</a:t>
-            </a:r>
-          </a:p>
-          <a:p>
-            <a:r>
-              <a:rPr sz="1200" b="0" i="1">
-                <a:solidFill>
-                  <a:srgbClr val="595959"/>
-                </a:solidFill>
-                <a:latin typeface="Arial"/>
-              </a:rPr>
-              <a:t>An EA repository is the single agreed place the architecture lives — the four layers, the entities and the decisions — so that one picture of your government exists instead of many private copies. Set it up first; everything else governs what goes into it.</a:t>
-            </a:r>
-          </a:p>
-        </p:txBody>
-      </p:sp>
-      <p:sp>
-        <p:nvSpPr>
-          <p:cNvPr id="17" name="Title 9">
-            <a:extLst>
-              <a:ext uri="{FF2B5EF4-FFF2-40B4-BE49-F238E27FC236}">
-                <a16:creationId xmlns:a16="http://schemas.microsoft.com/office/drawing/2014/main" id="{5E8796F7-DD26-D250-5E97-B38B22298E72}"/>
-              </a:ext>
-            </a:extLst>
-          </p:cNvPr>
-          <p:cNvSpPr txBox="1">
-            <a:spLocks/>
-          </p:cNvSpPr>
-          <p:nvPr/>
-        </p:nvSpPr>
-        <p:spPr>
-          <a:xfrm>
-            <a:off x="284452" y="4363897"/>
-            <a:ext cx="6382893" cy="953213"/>
-          </a:xfrm>
-          <a:prstGeom prst="rect">
-            <a:avLst/>
-          </a:prstGeom>
-        </p:spPr>
-        <p:txBody>
-          <a:bodyPr anchor="t">
-            <a:noAutofit/>
-          </a:bodyPr>
-          <a:lstStyle>
-            <a:lvl1pPr algn="l" defTabSz="914400" rtl="0" eaLnBrk="1" latinLnBrk="0" hangingPunct="1">
-              <a:lnSpc>
-                <a:spcPct val="90000"/>
-              </a:lnSpc>
-              <a:spcBef>
-                <a:spcPct val="0"/>
-              </a:spcBef>
-              <a:buNone/>
-              <a:defRPr sz="4000" kern="1200">
-                <a:solidFill>
-                  <a:schemeClr val="bg1"/>
-                </a:solidFill>
-                <a:latin typeface="Arial" panose="020B0604020202020204" pitchFamily="34" charset="0"/>
-                <a:ea typeface="+mj-ea"/>
-                <a:cs typeface="Arial" panose="020B0604020202020204" pitchFamily="34" charset="0"/>
-              </a:defRPr>
-            </a:lvl1pPr>
-          </a:lstStyle>
-          <a:p>
-            <a:pPr marL="0" marR="0" lvl="0" indent="0" rtl="0">
-              <a:spcBef>
-                <a:spcPts val="600"/>
-              </a:spcBef>
-              <a:spcAft>
-                <a:spcPts val="1200"/>
-              </a:spcAft>
-              <a:buNone/>
-            </a:pPr>
-            <a:r>
-              <a:rPr sz="1400" b="1" i="0">
-                <a:solidFill>
-                  <a:srgbClr val="1A1A1A"/>
-                </a:solidFill>
-                <a:latin typeface="Arial"/>
-              </a:rPr>
-              <a:t>Target audience: </a:t>
-            </a:r>
-            <a:r>
-              <a:rPr sz="1400" b="0" i="0">
-                <a:solidFill>
-                  <a:srgbClr val="1A1A1A"/>
-                </a:solidFill>
-                <a:latin typeface="Arial"/>
-              </a:rPr>
-              <a:t>Chief architect · senior architect · sector ICT lead</a:t>
-            </a:r>
-          </a:p>
-        </p:txBody>
-      </p:sp>
-      <p:sp>
-        <p:nvSpPr>
-          <p:cNvPr id="18" name="Rectangle 17"/>
+              <a:t>IN ONE SENTENCE</a:t>
+            </a:r>
+          </a:p>
+        </p:txBody>
+      </p:sp>
+      <p:sp>
+        <p:nvSpPr>
+          <p:cNvPr id="4" name="Rounded Rectangle 3"/>
           <p:cNvSpPr/>
           <p:nvPr/>
         </p:nvSpPr>
         <p:spPr>
           <a:xfrm>
-            <a:off x="7022592" y="0"/>
-            <a:ext cx="5169103" cy="6858000"/>
-          </a:xfrm>
-          <a:prstGeom prst="rect">
-            <a:avLst/>
+            <a:off x="658368" y="4709160"/>
+            <a:ext cx="10881360" cy="1554480"/>
+          </a:xfrm>
+          <a:prstGeom prst="roundRect">
+            <a:avLst>
+              <a:gd name="adj" fmla="val 4500"/>
+            </a:avLst>
           </a:prstGeom>
           <a:solidFill>
-            <a:srgbClr val="009CD6"/>
+            <a:srgbClr val="FFFFFF"/>
           </a:solidFill>
-          <a:ln>
-            <a:noFill/>
+          <a:ln w="9525">
+            <a:solidFill>
+              <a:srgbClr val="009CD6"/>
+            </a:solidFill>
           </a:ln>
           <a:effectLst/>
         </p:spPr>
@@ -12016,277 +11786,63 @@
           </a:fontRef>
         </p:style>
         <p:txBody>
-          <a:bodyPr rtlCol="0" anchor="ctr"/>
-          <a:lstStyle/>
-          <a:p>
-            <a:pPr algn="ctr"/>
-          </a:p>
-        </p:txBody>
-      </p:sp>
-      <p:sp>
-        <p:nvSpPr>
-          <p:cNvPr id="19" name="TextBox 18"/>
-          <p:cNvSpPr txBox="1"/>
-          <p:nvPr/>
-        </p:nvSpPr>
-        <p:spPr>
-          <a:xfrm>
-            <a:off x="7452360" y="457200"/>
-            <a:ext cx="4297680" cy="457200"/>
-          </a:xfrm>
-          <a:prstGeom prst="rect">
-            <a:avLst/>
-          </a:prstGeom>
-          <a:noFill/>
-        </p:spPr>
-        <p:txBody>
-          <a:bodyPr wrap="square">
-            <a:spAutoFit/>
+          <a:bodyPr rtlCol="0" anchor="ctr" wrap="square" lIns="228600" rIns="228600" tIns="109728" bIns="109728">
+            <a:noAutofit/>
           </a:bodyPr>
           <a:lstStyle/>
           <a:p>
-            <a:r>
-              <a:rPr sz="1100" b="1" i="0">
+            <a:pPr algn="l">
+              <a:spcAft>
+                <a:spcPts val="400"/>
+              </a:spcAft>
+            </a:pPr>
+            <a:r>
+              <a:rPr sz="1800" b="1" i="0">
                 <a:solidFill>
-                  <a:srgbClr val="E5F5FB"/>
+                  <a:srgbClr val="006E96"/>
                 </a:solidFill>
                 <a:latin typeface="Arial"/>
               </a:rPr>
-              <a:t>THE PRACTICE THIS MODULE STANDS UP</a:t>
-            </a:r>
-          </a:p>
-        </p:txBody>
-      </p:sp>
-      <p:sp>
-        <p:nvSpPr>
-          <p:cNvPr id="20" name="Rounded Rectangle 19"/>
-          <p:cNvSpPr/>
-          <p:nvPr/>
-        </p:nvSpPr>
-        <p:spPr>
-          <a:xfrm>
-            <a:off x="7452360" y="960120"/>
-            <a:ext cx="3840480" cy="658368"/>
-          </a:xfrm>
-          <a:prstGeom prst="roundRect">
-            <a:avLst>
-              <a:gd name="adj" fmla="val 14000"/>
-            </a:avLst>
-          </a:prstGeom>
-          <a:solidFill>
-            <a:srgbClr val="FFFFFF"/>
-          </a:solidFill>
-          <a:ln>
-            <a:noFill/>
-          </a:ln>
-          <a:effectLst/>
-        </p:spPr>
-        <p:style>
-          <a:lnRef idx="1">
-            <a:schemeClr val="accent1"/>
-          </a:lnRef>
-          <a:fillRef idx="3">
-            <a:schemeClr val="accent1"/>
-          </a:fillRef>
-          <a:effectRef idx="2">
-            <a:schemeClr val="accent1"/>
-          </a:effectRef>
-          <a:fontRef idx="minor">
-            <a:schemeClr val="lt1"/>
-          </a:fontRef>
-        </p:style>
-        <p:txBody>
-          <a:bodyPr rtlCol="0" anchor="ctr" lIns="164592" wrap="square"/>
-          <a:lstStyle/>
-          <a:p>
-            <a:pPr algn="ctr"/>
-            <a:r>
-              <a:rPr sz="1500" b="1" i="0">
+              <a:t>Do this on your own sector. </a:t>
+            </a:r>
+            <a:r>
+              <a:rPr sz="1800" b="1" i="0">
                 <a:solidFill>
                   <a:srgbClr val="1A1A1A"/>
                 </a:solidFill>
                 <a:latin typeface="Arial"/>
               </a:rPr>
-              <a:t>Repository — where the architecture lives</a:t>
-            </a:r>
-          </a:p>
-        </p:txBody>
-      </p:sp>
-      <p:sp>
-        <p:nvSpPr>
-          <p:cNvPr id="21" name="Rounded Rectangle 20"/>
-          <p:cNvSpPr/>
-          <p:nvPr/>
-        </p:nvSpPr>
-        <p:spPr>
-          <a:xfrm>
-            <a:off x="7452360" y="1892808"/>
-            <a:ext cx="3840480" cy="658368"/>
-          </a:xfrm>
-          <a:prstGeom prst="roundRect">
-            <a:avLst>
-              <a:gd name="adj" fmla="val 14000"/>
-            </a:avLst>
-          </a:prstGeom>
-          <a:solidFill>
-            <a:srgbClr val="FFFFFF"/>
-          </a:solidFill>
-          <a:ln>
-            <a:noFill/>
-          </a:ln>
-          <a:effectLst/>
-        </p:spPr>
-        <p:style>
-          <a:lnRef idx="1">
-            <a:schemeClr val="accent1"/>
-          </a:lnRef>
-          <a:fillRef idx="3">
-            <a:schemeClr val="accent1"/>
-          </a:fillRef>
-          <a:effectRef idx="2">
-            <a:schemeClr val="accent1"/>
-          </a:effectRef>
-          <a:fontRef idx="minor">
-            <a:schemeClr val="lt1"/>
-          </a:fontRef>
-        </p:style>
-        <p:txBody>
-          <a:bodyPr rtlCol="0" anchor="ctr" lIns="164592" wrap="square"/>
-          <a:lstStyle/>
-          <a:p>
-            <a:pPr algn="ctr"/>
-            <a:r>
-              <a:rPr sz="1500" b="1" i="0">
+              <a:t>Design your EA repository's structure.</a:t>
+            </a:r>
+          </a:p>
+          <a:p>
+            <a:pPr algn="l">
+              <a:spcAft>
+                <a:spcPts val="400"/>
+              </a:spcAft>
+            </a:pPr>
+            <a:r>
+              <a:rPr sz="1800" b="0" i="0">
                 <a:solidFill>
-                  <a:srgbClr val="1A1A1A"/>
+                  <a:srgbClr val="595959"/>
                 </a:solidFill>
                 <a:latin typeface="Arial"/>
               </a:rPr>
-              <a:t>Tooling — chosen without lock-in</a:t>
-            </a:r>
-          </a:p>
-        </p:txBody>
-      </p:sp>
-      <p:sp>
-        <p:nvSpPr>
-          <p:cNvPr id="22" name="Rounded Rectangle 21"/>
-          <p:cNvSpPr/>
-          <p:nvPr/>
-        </p:nvSpPr>
-        <p:spPr>
-          <a:xfrm>
-            <a:off x="7452360" y="2825496"/>
-            <a:ext cx="3840480" cy="658368"/>
-          </a:xfrm>
-          <a:prstGeom prst="roundRect">
-            <a:avLst>
-              <a:gd name="adj" fmla="val 14000"/>
-            </a:avLst>
-          </a:prstGeom>
-          <a:solidFill>
-            <a:srgbClr val="FFFFFF"/>
-          </a:solidFill>
-          <a:ln>
-            <a:noFill/>
-          </a:ln>
-          <a:effectLst/>
-        </p:spPr>
-        <p:style>
-          <a:lnRef idx="1">
-            <a:schemeClr val="accent1"/>
-          </a:lnRef>
-          <a:fillRef idx="3">
-            <a:schemeClr val="accent1"/>
-          </a:fillRef>
-          <a:effectRef idx="2">
-            <a:schemeClr val="accent1"/>
-          </a:effectRef>
-          <a:fontRef idx="minor">
-            <a:schemeClr val="lt1"/>
-          </a:fontRef>
-        </p:style>
-        <p:txBody>
-          <a:bodyPr rtlCol="0" anchor="ctr" lIns="164592" wrap="square"/>
-          <a:lstStyle/>
-          <a:p>
-            <a:pPr algn="ctr"/>
-            <a:r>
-              <a:rPr sz="1500" b="1" i="0">
-                <a:solidFill>
-                  <a:srgbClr val="1A1A1A"/>
-                </a:solidFill>
-                <a:latin typeface="Arial"/>
-              </a:rPr>
-              <a:t>Governance — a Board and a gate</a:t>
-            </a:r>
-          </a:p>
-        </p:txBody>
-      </p:sp>
-      <p:sp>
-        <p:nvSpPr>
-          <p:cNvPr id="23" name="Rounded Rectangle 22"/>
-          <p:cNvSpPr/>
-          <p:nvPr/>
-        </p:nvSpPr>
-        <p:spPr>
-          <a:xfrm>
-            <a:off x="7452360" y="3758184"/>
-            <a:ext cx="3840480" cy="658368"/>
-          </a:xfrm>
-          <a:prstGeom prst="roundRect">
-            <a:avLst>
-              <a:gd name="adj" fmla="val 14000"/>
-            </a:avLst>
-          </a:prstGeom>
-          <a:solidFill>
-            <a:srgbClr val="006E96"/>
-          </a:solidFill>
-          <a:ln>
-            <a:noFill/>
-          </a:ln>
-          <a:effectLst/>
-        </p:spPr>
-        <p:style>
-          <a:lnRef idx="1">
-            <a:schemeClr val="accent1"/>
-          </a:lnRef>
-          <a:fillRef idx="3">
-            <a:schemeClr val="accent1"/>
-          </a:fillRef>
-          <a:effectRef idx="2">
-            <a:schemeClr val="accent1"/>
-          </a:effectRef>
-          <a:fontRef idx="minor">
-            <a:schemeClr val="lt1"/>
-          </a:fontRef>
-        </p:style>
-        <p:txBody>
-          <a:bodyPr rtlCol="0" anchor="ctr" lIns="164592" wrap="square"/>
-          <a:lstStyle/>
-          <a:p>
-            <a:pPr algn="ctr"/>
-            <a:r>
-              <a:rPr sz="1500" b="1" i="0">
-                <a:solidFill>
-                  <a:srgbClr val="FFFFFF"/>
-                </a:solidFill>
-                <a:latin typeface="Arial"/>
-              </a:rPr>
-              <a:t>Sustainment — alive past year two</a:t>
-            </a:r>
-          </a:p>
-        </p:txBody>
-      </p:sp>
-      <p:sp>
-        <p:nvSpPr>
-          <p:cNvPr id="24" name="TextBox 23"/>
+              <a:t>The prompt in the companion material gives you a repository schema plus single-source rules. Before the next video.</a:t>
+            </a:r>
+          </a:p>
+        </p:txBody>
+      </p:sp>
+      <p:sp>
+        <p:nvSpPr>
+          <p:cNvPr id="5" name="TextBox 4"/>
           <p:cNvSpPr txBox="1"/>
           <p:nvPr/>
         </p:nvSpPr>
         <p:spPr>
           <a:xfrm>
-            <a:off x="7452360" y="5806440"/>
-            <a:ext cx="4297680" cy="731520"/>
+            <a:off x="457200" y="6473952"/>
+            <a:ext cx="7772400" cy="292608"/>
           </a:xfrm>
           <a:prstGeom prst="rect">
             <a:avLst/>
@@ -12300,23 +11856,53 @@
           <a:lstStyle/>
           <a:p>
             <a:r>
-              <a:rPr sz="1200" b="0" i="0">
+              <a:rPr sz="900" b="0" i="0">
                 <a:solidFill>
-                  <a:srgbClr val="FFFFFF"/>
+                  <a:srgbClr val="595959"/>
                 </a:solidFill>
                 <a:latin typeface="Arial"/>
               </a:rPr>
-              <a:t>5 gate questions · 4 health metrics · 4 ways a practice fades</a:t>
+              <a:t>3.1 · Set up the one place your architecture lives</a:t>
+            </a:r>
+          </a:p>
+        </p:txBody>
+      </p:sp>
+      <p:sp>
+        <p:nvSpPr>
+          <p:cNvPr id="6" name="TextBox 5"/>
+          <p:cNvSpPr txBox="1"/>
+          <p:nvPr/>
+        </p:nvSpPr>
+        <p:spPr>
+          <a:xfrm>
+            <a:off x="10058400" y="6473952"/>
+            <a:ext cx="1673352" cy="292608"/>
+          </a:xfrm>
+          <a:prstGeom prst="rect">
+            <a:avLst/>
+          </a:prstGeom>
+          <a:noFill/>
+        </p:spPr>
+        <p:txBody>
+          <a:bodyPr wrap="square">
+            <a:spAutoFit/>
+          </a:bodyPr>
+          <a:lstStyle/>
+          <a:p>
+            <a:pPr algn="r"/>
+            <a:r>
+              <a:rPr sz="900" b="0" i="0">
+                <a:solidFill>
+                  <a:srgbClr val="595959"/>
+                </a:solidFill>
+                <a:latin typeface="Arial"/>
+              </a:rPr>
+              <a:t>www.itu.int</a:t>
             </a:r>
           </a:p>
         </p:txBody>
       </p:sp>
     </p:spTree>
-    <p:extLst>
-      <p:ext uri="{BB962C8B-B14F-4D97-AF65-F5344CB8AC3E}">
-        <p14:creationId xmlns:p14="http://schemas.microsoft.com/office/powerpoint/2010/main" val="1196800265"/>
-      </p:ext>
-    </p:extLst>
   </p:cSld>
   <p:clrMapOvr>
     <a:masterClrMapping/>
@@ -12324,7 +11910,7 @@
 </p:sld>
 </file>
 
-<file path=ppt/slides/slide10.xml><?xml version="1.0" encoding="utf-8"?>
+<file path=ppt/slides/slide11.xml><?xml version="1.0" encoding="utf-8"?>
 <p:sld xmlns:a="http://schemas.openxmlformats.org/drawingml/2006/main" xmlns:p="http://schemas.openxmlformats.org/presentationml/2006/main" xmlns:r="http://schemas.openxmlformats.org/officeDocument/2006/relationships">
   <p:cSld>
     <p:spTree>
@@ -12759,58 +12345,14 @@
       <p:grpSpPr/>
       <p:sp>
         <p:nvSpPr>
-          <p:cNvPr id="2" name="Rectangle 1"/>
-          <p:cNvSpPr/>
-          <p:nvPr/>
-        </p:nvSpPr>
-        <p:spPr>
-          <a:xfrm>
-            <a:off x="457200" y="384048"/>
-            <a:ext cx="45720" cy="256032"/>
-          </a:xfrm>
-          <a:prstGeom prst="rect">
-            <a:avLst/>
-          </a:prstGeom>
-          <a:solidFill>
-            <a:srgbClr val="009CD6"/>
-          </a:solidFill>
-          <a:ln>
-            <a:noFill/>
-          </a:ln>
-          <a:effectLst/>
-        </p:spPr>
-        <p:style>
-          <a:lnRef idx="1">
-            <a:schemeClr val="accent1"/>
-          </a:lnRef>
-          <a:fillRef idx="3">
-            <a:schemeClr val="accent1"/>
-          </a:fillRef>
-          <a:effectRef idx="2">
-            <a:schemeClr val="accent1"/>
-          </a:effectRef>
-          <a:fontRef idx="minor">
-            <a:schemeClr val="lt1"/>
-          </a:fontRef>
-        </p:style>
-        <p:txBody>
-          <a:bodyPr rtlCol="0" anchor="ctr"/>
-          <a:lstStyle/>
-          <a:p>
-            <a:pPr algn="ctr"/>
-          </a:p>
-        </p:txBody>
-      </p:sp>
-      <p:sp>
-        <p:nvSpPr>
-          <p:cNvPr id="3" name="TextBox 2"/>
+          <p:cNvPr id="2" name="TextBox 1"/>
           <p:cNvSpPr txBox="1"/>
           <p:nvPr/>
         </p:nvSpPr>
         <p:spPr>
           <a:xfrm>
-            <a:off x="621792" y="274320"/>
-            <a:ext cx="11247120" cy="914400"/>
+            <a:off x="1005840" y="1325880"/>
+            <a:ext cx="5486400" cy="365760"/>
           </a:xfrm>
           <a:prstGeom prst="rect">
             <a:avLst/>
@@ -12824,80 +12366,61 @@
           <a:lstStyle/>
           <a:p>
             <a:r>
-              <a:rPr sz="2800" b="1" i="0">
+              <a:rPr sz="1200" b="1" i="0">
+                <a:solidFill>
+                  <a:srgbClr val="006E96"/>
+                </a:solidFill>
+                <a:latin typeface="Arial"/>
+              </a:rPr>
+              <a:t>WHERE WE START</a:t>
+            </a:r>
+          </a:p>
+        </p:txBody>
+      </p:sp>
+      <p:sp>
+        <p:nvSpPr>
+          <p:cNvPr id="3" name="TextBox 2"/>
+          <p:cNvSpPr txBox="1"/>
+          <p:nvPr/>
+        </p:nvSpPr>
+        <p:spPr>
+          <a:xfrm>
+            <a:off x="1005840" y="1783080"/>
+            <a:ext cx="10149840" cy="1737360"/>
+          </a:xfrm>
+          <a:prstGeom prst="rect">
+            <a:avLst/>
+          </a:prstGeom>
+          <a:noFill/>
+        </p:spPr>
+        <p:txBody>
+          <a:bodyPr wrap="square">
+            <a:spAutoFit/>
+          </a:bodyPr>
+          <a:lstStyle/>
+          <a:p>
+            <a:r>
+              <a:rPr sz="3000" b="1" i="0">
                 <a:solidFill>
                   <a:srgbClr val="1A1A1A"/>
                 </a:solidFill>
                 <a:latin typeface="Arial"/>
               </a:rPr>
-              <a:t>A repository is a discipline, not a product</a:t>
-            </a:r>
-          </a:p>
-        </p:txBody>
-      </p:sp>
-      <p:sp>
-        <p:nvSpPr>
-          <p:cNvPr id="4" name="Oval 3"/>
-          <p:cNvSpPr/>
-          <p:nvPr/>
-        </p:nvSpPr>
-        <p:spPr>
-          <a:xfrm>
-            <a:off x="621792" y="1508760"/>
-            <a:ext cx="310896" cy="310896"/>
-          </a:xfrm>
-          <a:prstGeom prst="ellipse">
-            <a:avLst/>
-          </a:prstGeom>
-          <a:solidFill>
-            <a:srgbClr val="009CD6"/>
-          </a:solidFill>
-          <a:ln>
-            <a:noFill/>
-          </a:ln>
-          <a:effectLst/>
-        </p:spPr>
-        <p:style>
-          <a:lnRef idx="1">
-            <a:schemeClr val="accent1"/>
-          </a:lnRef>
-          <a:fillRef idx="3">
-            <a:schemeClr val="accent1"/>
-          </a:fillRef>
-          <a:effectRef idx="2">
-            <a:schemeClr val="accent1"/>
-          </a:effectRef>
-          <a:fontRef idx="minor">
-            <a:schemeClr val="lt1"/>
-          </a:fontRef>
-        </p:style>
-        <p:txBody>
-          <a:bodyPr rtlCol="0" anchor="ctr" lIns="0" rIns="0" tIns="0" bIns="0" wrap="square"/>
-          <a:lstStyle/>
-          <a:p>
-            <a:pPr algn="ctr"/>
-            <a:r>
-              <a:rPr sz="1300" b="1" i="0">
-                <a:solidFill>
-                  <a:srgbClr val="FFFFFF"/>
-                </a:solidFill>
-                <a:latin typeface="Arial"/>
-              </a:rPr>
-              <a:t>1</a:t>
-            </a:r>
-          </a:p>
-        </p:txBody>
-      </p:sp>
-      <p:sp>
-        <p:nvSpPr>
-          <p:cNvPr id="5" name="TextBox 4"/>
+              <a:t>You have the four-layer picture of a sector. Where does it live?</a:t>
+            </a:r>
+          </a:p>
+        </p:txBody>
+      </p:sp>
+      <p:sp>
+        <p:nvSpPr>
+          <p:cNvPr id="4" name="TextBox 3"/>
           <p:cNvSpPr txBox="1"/>
           <p:nvPr/>
         </p:nvSpPr>
         <p:spPr>
           <a:xfrm>
-            <a:off x="1115568" y="1463040"/>
-            <a:ext cx="10527487" cy="1386839"/>
+            <a:off x="1005840" y="3611880"/>
+            <a:ext cx="10149840" cy="2377440"/>
           </a:xfrm>
           <a:prstGeom prst="rect">
             <a:avLst/>
@@ -12912,378 +12435,40 @@
           <a:p>
             <a:pPr>
               <a:spcAft>
-                <a:spcPts val="300"/>
+                <a:spcPts val="800"/>
               </a:spcAft>
             </a:pPr>
             <a:r>
-              <a:rPr sz="1900" b="1" i="0">
-                <a:solidFill>
-                  <a:srgbClr val="1A1A1A"/>
-                </a:solidFill>
-                <a:latin typeface="Arial"/>
-              </a:rPr>
-              <a:t>The four layers</a:t>
-            </a:r>
-          </a:p>
-          <a:p>
-            <a:pPr>
-              <a:spcAft>
-                <a:spcPts val="300"/>
-              </a:spcAft>
-            </a:pPr>
-            <a:r>
-              <a:rPr sz="1550" b="0" i="0">
+              <a:rPr sz="1700" b="0" i="0">
                 <a:solidFill>
                   <a:srgbClr val="595959"/>
                 </a:solidFill>
                 <a:latin typeface="Arial"/>
               </a:rPr>
-              <a:t>The capabilities, data domains, applications and technology you mapped.</a:t>
-            </a:r>
-          </a:p>
-        </p:txBody>
-      </p:sp>
-      <p:sp>
-        <p:nvSpPr>
-          <p:cNvPr id="6" name="Rectangle 5"/>
-          <p:cNvSpPr/>
-          <p:nvPr/>
-        </p:nvSpPr>
-        <p:spPr>
-          <a:xfrm>
-            <a:off x="621792" y="2854452"/>
-            <a:ext cx="10881360" cy="12700"/>
-          </a:xfrm>
-          <a:prstGeom prst="rect">
-            <a:avLst/>
-          </a:prstGeom>
-          <a:solidFill>
-            <a:srgbClr val="DDECF4"/>
-          </a:solidFill>
-          <a:ln>
-            <a:noFill/>
-          </a:ln>
-          <a:effectLst/>
-        </p:spPr>
-        <p:style>
-          <a:lnRef idx="1">
-            <a:schemeClr val="accent1"/>
-          </a:lnRef>
-          <a:fillRef idx="3">
-            <a:schemeClr val="accent1"/>
-          </a:fillRef>
-          <a:effectRef idx="2">
-            <a:schemeClr val="accent1"/>
-          </a:effectRef>
-          <a:fontRef idx="minor">
-            <a:schemeClr val="lt1"/>
-          </a:fontRef>
-        </p:style>
-        <p:txBody>
-          <a:bodyPr rtlCol="0" anchor="ctr"/>
-          <a:lstStyle/>
-          <a:p>
-            <a:pPr algn="ctr"/>
-          </a:p>
-        </p:txBody>
-      </p:sp>
-      <p:sp>
-        <p:nvSpPr>
-          <p:cNvPr id="7" name="Oval 6"/>
-          <p:cNvSpPr/>
-          <p:nvPr/>
-        </p:nvSpPr>
-        <p:spPr>
-          <a:xfrm>
-            <a:off x="621792" y="2941319"/>
-            <a:ext cx="310896" cy="310896"/>
-          </a:xfrm>
-          <a:prstGeom prst="ellipse">
-            <a:avLst/>
-          </a:prstGeom>
-          <a:solidFill>
-            <a:srgbClr val="009CD6"/>
-          </a:solidFill>
-          <a:ln>
-            <a:noFill/>
-          </a:ln>
-          <a:effectLst/>
-        </p:spPr>
-        <p:style>
-          <a:lnRef idx="1">
-            <a:schemeClr val="accent1"/>
-          </a:lnRef>
-          <a:fillRef idx="3">
-            <a:schemeClr val="accent1"/>
-          </a:fillRef>
-          <a:effectRef idx="2">
-            <a:schemeClr val="accent1"/>
-          </a:effectRef>
-          <a:fontRef idx="minor">
-            <a:schemeClr val="lt1"/>
-          </a:fontRef>
-        </p:style>
-        <p:txBody>
-          <a:bodyPr rtlCol="0" anchor="ctr" lIns="0" rIns="0" tIns="0" bIns="0" wrap="square"/>
-          <a:lstStyle/>
-          <a:p>
-            <a:pPr algn="ctr"/>
-            <a:r>
-              <a:rPr sz="1300" b="1" i="0">
-                <a:solidFill>
-                  <a:srgbClr val="FFFFFF"/>
-                </a:solidFill>
-                <a:latin typeface="Arial"/>
-              </a:rPr>
-              <a:t>2</a:t>
-            </a:r>
-          </a:p>
-        </p:txBody>
-      </p:sp>
-      <p:sp>
-        <p:nvSpPr>
-          <p:cNvPr id="8" name="TextBox 7"/>
-          <p:cNvSpPr txBox="1"/>
-          <p:nvPr/>
-        </p:nvSpPr>
-        <p:spPr>
-          <a:xfrm>
-            <a:off x="1115568" y="2895600"/>
-            <a:ext cx="10527487" cy="1386839"/>
-          </a:xfrm>
-          <a:prstGeom prst="rect">
-            <a:avLst/>
-          </a:prstGeom>
-          <a:noFill/>
-        </p:spPr>
-        <p:txBody>
-          <a:bodyPr wrap="square">
-            <a:spAutoFit/>
-          </a:bodyPr>
-          <a:lstStyle/>
+              <a:t>A slide deck on your laptop: out of date within a month, disagreed with within two.</a:t>
+            </a:r>
+          </a:p>
           <a:p>
             <a:pPr>
               <a:spcAft>
-                <a:spcPts val="300"/>
+                <a:spcPts val="800"/>
               </a:spcAft>
             </a:pPr>
             <a:r>
-              <a:rPr sz="1900" b="1" i="0">
-                <a:solidFill>
-                  <a:srgbClr val="1A1A1A"/>
-                </a:solidFill>
-                <a:latin typeface="Arial"/>
-              </a:rPr>
-              <a:t>The relationships</a:t>
-            </a:r>
-          </a:p>
-          <a:p>
-            <a:pPr>
-              <a:spcAft>
-                <a:spcPts val="300"/>
-              </a:spcAft>
-            </a:pPr>
-            <a:r>
-              <a:rPr sz="1550" b="0" i="0">
+              <a:rPr sz="1700" b="0" i="0">
                 <a:solidFill>
                   <a:srgbClr val="595959"/>
                 </a:solidFill>
                 <a:latin typeface="Arial"/>
               </a:rPr>
-              <a:t>How they connect, expressed with the shared entities.</a:t>
-            </a:r>
-          </a:p>
-        </p:txBody>
-      </p:sp>
-      <p:sp>
-        <p:nvSpPr>
-          <p:cNvPr id="9" name="Rectangle 8"/>
-          <p:cNvSpPr/>
-          <p:nvPr/>
-        </p:nvSpPr>
-        <p:spPr>
-          <a:xfrm>
-            <a:off x="621792" y="4287011"/>
-            <a:ext cx="10881360" cy="12700"/>
-          </a:xfrm>
-          <a:prstGeom prst="rect">
-            <a:avLst/>
-          </a:prstGeom>
-          <a:solidFill>
-            <a:srgbClr val="DDECF4"/>
-          </a:solidFill>
-          <a:ln>
-            <a:noFill/>
-          </a:ln>
-          <a:effectLst/>
-        </p:spPr>
-        <p:style>
-          <a:lnRef idx="1">
-            <a:schemeClr val="accent1"/>
-          </a:lnRef>
-          <a:fillRef idx="3">
-            <a:schemeClr val="accent1"/>
-          </a:fillRef>
-          <a:effectRef idx="2">
-            <a:schemeClr val="accent1"/>
-          </a:effectRef>
-          <a:fontRef idx="minor">
-            <a:schemeClr val="lt1"/>
-          </a:fontRef>
-        </p:style>
-        <p:txBody>
-          <a:bodyPr rtlCol="0" anchor="ctr"/>
-          <a:lstStyle/>
-          <a:p>
-            <a:pPr algn="ctr"/>
-          </a:p>
-        </p:txBody>
-      </p:sp>
-      <p:sp>
-        <p:nvSpPr>
-          <p:cNvPr id="10" name="Oval 9"/>
-          <p:cNvSpPr/>
-          <p:nvPr/>
-        </p:nvSpPr>
-        <p:spPr>
-          <a:xfrm>
-            <a:off x="621792" y="4373879"/>
-            <a:ext cx="310896" cy="310896"/>
-          </a:xfrm>
-          <a:prstGeom prst="ellipse">
-            <a:avLst/>
-          </a:prstGeom>
-          <a:solidFill>
-            <a:srgbClr val="009CD6"/>
-          </a:solidFill>
-          <a:ln>
-            <a:noFill/>
-          </a:ln>
-          <a:effectLst/>
-        </p:spPr>
-        <p:style>
-          <a:lnRef idx="1">
-            <a:schemeClr val="accent1"/>
-          </a:lnRef>
-          <a:fillRef idx="3">
-            <a:schemeClr val="accent1"/>
-          </a:fillRef>
-          <a:effectRef idx="2">
-            <a:schemeClr val="accent1"/>
-          </a:effectRef>
-          <a:fontRef idx="minor">
-            <a:schemeClr val="lt1"/>
-          </a:fontRef>
-        </p:style>
-        <p:txBody>
-          <a:bodyPr rtlCol="0" anchor="ctr" lIns="0" rIns="0" tIns="0" bIns="0" wrap="square"/>
-          <a:lstStyle/>
-          <a:p>
-            <a:pPr algn="ctr"/>
-            <a:r>
-              <a:rPr sz="1300" b="1" i="0">
-                <a:solidFill>
-                  <a:srgbClr val="FFFFFF"/>
-                </a:solidFill>
-                <a:latin typeface="Arial"/>
-              </a:rPr>
-              <a:t>3</a:t>
-            </a:r>
-          </a:p>
-        </p:txBody>
-      </p:sp>
-      <p:sp>
-        <p:nvSpPr>
-          <p:cNvPr id="11" name="TextBox 10"/>
-          <p:cNvSpPr txBox="1"/>
-          <p:nvPr/>
-        </p:nvSpPr>
-        <p:spPr>
-          <a:xfrm>
-            <a:off x="1115568" y="4328159"/>
-            <a:ext cx="10527487" cy="1386839"/>
-          </a:xfrm>
-          <a:prstGeom prst="rect">
-            <a:avLst/>
-          </a:prstGeom>
-          <a:noFill/>
-        </p:spPr>
-        <p:txBody>
-          <a:bodyPr wrap="square">
-            <a:spAutoFit/>
-          </a:bodyPr>
-          <a:lstStyle/>
-          <a:p>
-            <a:pPr>
-              <a:spcAft>
-                <a:spcPts val="300"/>
-              </a:spcAft>
-            </a:pPr>
-            <a:r>
-              <a:rPr sz="1900" b="1" i="0">
-                <a:solidFill>
-                  <a:srgbClr val="1A1A1A"/>
-                </a:solidFill>
-                <a:latin typeface="Arial"/>
-              </a:rPr>
-              <a:t>The decisions</a:t>
-            </a:r>
-          </a:p>
-          <a:p>
-            <a:pPr>
-              <a:spcAft>
-                <a:spcPts val="300"/>
-              </a:spcAft>
-            </a:pPr>
-            <a:r>
-              <a:rPr sz="1550" b="0" i="0">
-                <a:solidFill>
-                  <a:srgbClr val="595959"/>
-                </a:solidFill>
-                <a:latin typeface="Arial"/>
-              </a:rPr>
-              <a:t>What the EA Board ruled — and why it ruled that way.</a:t>
-            </a:r>
-          </a:p>
-        </p:txBody>
-      </p:sp>
-      <p:sp>
-        <p:nvSpPr>
-          <p:cNvPr id="12" name="TextBox 11"/>
-          <p:cNvSpPr txBox="1"/>
-          <p:nvPr/>
-        </p:nvSpPr>
-        <p:spPr>
-          <a:xfrm>
-            <a:off x="658368" y="5870448"/>
-            <a:ext cx="10881360" cy="548640"/>
-          </a:xfrm>
-          <a:prstGeom prst="rect">
-            <a:avLst/>
-          </a:prstGeom>
-          <a:noFill/>
-        </p:spPr>
-        <p:txBody>
-          <a:bodyPr wrap="square">
-            <a:spAutoFit/>
-          </a:bodyPr>
-          <a:lstStyle/>
-          <a:p>
-            <a:r>
-              <a:rPr sz="1550" b="1" i="0">
-                <a:solidFill>
-                  <a:srgbClr val="006E96"/>
-                </a:solidFill>
-                <a:latin typeface="Arial"/>
-              </a:rPr>
-              <a:t>Not a building. Not a particular software product. One agreed store — one version everyone trusts.</a:t>
-            </a:r>
-          </a:p>
-        </p:txBody>
-      </p:sp>
-      <p:sp>
-        <p:nvSpPr>
-          <p:cNvPr id="13" name="TextBox 12"/>
+              <a:t>It needs a home.</a:t>
+            </a:r>
+          </a:p>
+        </p:txBody>
+      </p:sp>
+      <p:sp>
+        <p:nvSpPr>
+          <p:cNvPr id="5" name="TextBox 4"/>
           <p:cNvSpPr txBox="1"/>
           <p:nvPr/>
         </p:nvSpPr>
@@ -13311,6 +12496,41 @@
                 <a:latin typeface="Arial"/>
               </a:rPr>
               <a:t>3.1 · Set up the one place your architecture lives</a:t>
+            </a:r>
+          </a:p>
+        </p:txBody>
+      </p:sp>
+      <p:sp>
+        <p:nvSpPr>
+          <p:cNvPr id="6" name="TextBox 5"/>
+          <p:cNvSpPr txBox="1"/>
+          <p:nvPr/>
+        </p:nvSpPr>
+        <p:spPr>
+          <a:xfrm>
+            <a:off x="10058400" y="6473952"/>
+            <a:ext cx="1673352" cy="292608"/>
+          </a:xfrm>
+          <a:prstGeom prst="rect">
+            <a:avLst/>
+          </a:prstGeom>
+          <a:noFill/>
+        </p:spPr>
+        <p:txBody>
+          <a:bodyPr wrap="square">
+            <a:spAutoFit/>
+          </a:bodyPr>
+          <a:lstStyle/>
+          <a:p>
+            <a:pPr algn="r"/>
+            <a:r>
+              <a:rPr sz="900" b="0" i="0">
+                <a:solidFill>
+                  <a:srgbClr val="595959"/>
+                </a:solidFill>
+                <a:latin typeface="Arial"/>
+              </a:rPr>
+              <a:t>www.itu.int</a:t>
             </a:r>
           </a:p>
         </p:txBody>
@@ -13406,84 +12626,27 @@
                 </a:solidFill>
                 <a:latin typeface="Arial"/>
               </a:rPr>
-              <a:t>A second copy does not add a backup — it destroys the single source of truth</a:t>
-            </a:r>
-          </a:p>
-        </p:txBody>
-      </p:sp>
-      <p:sp>
-        <p:nvSpPr>
-          <p:cNvPr id="4" name="TextBox 3"/>
-          <p:cNvSpPr txBox="1"/>
+              <a:t>A repository is a discipline, not a product</a:t>
+            </a:r>
+          </a:p>
+        </p:txBody>
+      </p:sp>
+      <p:sp>
+        <p:nvSpPr>
+          <p:cNvPr id="4" name="Oval 3"/>
+          <p:cNvSpPr/>
           <p:nvPr/>
         </p:nvSpPr>
         <p:spPr>
           <a:xfrm>
-            <a:off x="658368" y="1600200"/>
-            <a:ext cx="10881360" cy="2651760"/>
-          </a:xfrm>
-          <a:prstGeom prst="rect">
+            <a:off x="621792" y="1508760"/>
+            <a:ext cx="310896" cy="310896"/>
+          </a:xfrm>
+          <a:prstGeom prst="ellipse">
             <a:avLst/>
           </a:prstGeom>
-          <a:noFill/>
-        </p:spPr>
-        <p:txBody>
-          <a:bodyPr wrap="square">
-            <a:spAutoFit/>
-          </a:bodyPr>
-          <a:lstStyle/>
-          <a:p>
-            <a:pPr>
-              <a:spcAft>
-                <a:spcPts val="1200"/>
-              </a:spcAft>
-            </a:pPr>
-            <a:r>
-              <a:rPr sz="2000" b="0" i="0">
-                <a:solidFill>
-                  <a:srgbClr val="1A1A1A"/>
-                </a:solidFill>
-                <a:latin typeface="Arial"/>
-              </a:rPr>
-              <a:t>The moment there are two copies, they drift. Then they disagree.</a:t>
-            </a:r>
-          </a:p>
-          <a:p>
-            <a:pPr>
-              <a:spcAft>
-                <a:spcPts val="1200"/>
-              </a:spcAft>
-            </a:pPr>
-            <a:r>
-              <a:rPr sz="2000" b="0" i="0">
-                <a:solidFill>
-                  <a:srgbClr val="1A1A1A"/>
-                </a:solidFill>
-                <a:latin typeface="Arial"/>
-              </a:rPr>
-              <a:t>One ministry works from last year’s picture; another from a newer one. People stop arguing about the architecture and start arguing about whose copy is right.</a:t>
-            </a:r>
-          </a:p>
-        </p:txBody>
-      </p:sp>
-      <p:sp>
-        <p:nvSpPr>
-          <p:cNvPr id="5" name="Rounded Rectangle 4"/>
-          <p:cNvSpPr/>
-          <p:nvPr/>
-        </p:nvSpPr>
-        <p:spPr>
-          <a:xfrm>
-            <a:off x="658368" y="4434840"/>
-            <a:ext cx="10881360" cy="1325880"/>
-          </a:xfrm>
-          <a:prstGeom prst="roundRect">
-            <a:avLst>
-              <a:gd name="adj" fmla="val 4500"/>
-            </a:avLst>
-          </a:prstGeom>
           <a:solidFill>
-            <a:srgbClr val="E5F5FB"/>
+            <a:srgbClr val="009CD6"/>
           </a:solidFill>
           <a:ln>
             <a:noFill/>
@@ -13505,23 +12668,32 @@
           </a:fontRef>
         </p:style>
         <p:txBody>
-          <a:bodyPr rtlCol="0" anchor="ctr"/>
+          <a:bodyPr rtlCol="0" anchor="ctr" lIns="0" rIns="0" tIns="0" bIns="0" wrap="square"/>
           <a:lstStyle/>
           <a:p>
             <a:pPr algn="ctr"/>
-          </a:p>
-        </p:txBody>
-      </p:sp>
-      <p:sp>
-        <p:nvSpPr>
-          <p:cNvPr id="6" name="TextBox 5"/>
+            <a:r>
+              <a:rPr sz="1300" b="1" i="0">
+                <a:solidFill>
+                  <a:srgbClr val="FFFFFF"/>
+                </a:solidFill>
+                <a:latin typeface="Arial"/>
+              </a:rPr>
+              <a:t>1</a:t>
+            </a:r>
+          </a:p>
+        </p:txBody>
+      </p:sp>
+      <p:sp>
+        <p:nvSpPr>
+          <p:cNvPr id="5" name="TextBox 4"/>
           <p:cNvSpPr txBox="1"/>
           <p:nvPr/>
         </p:nvSpPr>
         <p:spPr>
           <a:xfrm>
-            <a:off x="859536" y="4626864"/>
-            <a:ext cx="10479024" cy="1051560"/>
+            <a:off x="1115568" y="1463040"/>
+            <a:ext cx="10527487" cy="1386839"/>
           </a:xfrm>
           <a:prstGeom prst="rect">
             <a:avLst/>
@@ -13536,24 +12708,378 @@
           <a:p>
             <a:pPr>
               <a:spcAft>
-                <a:spcPts val="700"/>
+                <a:spcPts val="300"/>
               </a:spcAft>
             </a:pPr>
             <a:r>
-              <a:rPr sz="2300" b="1" i="0">
+              <a:rPr sz="1900" b="1" i="0">
+                <a:solidFill>
+                  <a:srgbClr val="1A1A1A"/>
+                </a:solidFill>
+                <a:latin typeface="Arial"/>
+              </a:rPr>
+              <a:t>The four layers</a:t>
+            </a:r>
+          </a:p>
+          <a:p>
+            <a:pPr>
+              <a:spcAft>
+                <a:spcPts val="300"/>
+              </a:spcAft>
+            </a:pPr>
+            <a:r>
+              <a:rPr sz="1550" b="0" i="0">
+                <a:solidFill>
+                  <a:srgbClr val="595959"/>
+                </a:solidFill>
+                <a:latin typeface="Arial"/>
+              </a:rPr>
+              <a:t>The capabilities, data domains, applications and technology you mapped.</a:t>
+            </a:r>
+          </a:p>
+        </p:txBody>
+      </p:sp>
+      <p:sp>
+        <p:nvSpPr>
+          <p:cNvPr id="6" name="Rectangle 5"/>
+          <p:cNvSpPr/>
+          <p:nvPr/>
+        </p:nvSpPr>
+        <p:spPr>
+          <a:xfrm>
+            <a:off x="621792" y="2854452"/>
+            <a:ext cx="10881360" cy="12700"/>
+          </a:xfrm>
+          <a:prstGeom prst="rect">
+            <a:avLst/>
+          </a:prstGeom>
+          <a:solidFill>
+            <a:srgbClr val="DDECF4"/>
+          </a:solidFill>
+          <a:ln>
+            <a:noFill/>
+          </a:ln>
+          <a:effectLst/>
+        </p:spPr>
+        <p:style>
+          <a:lnRef idx="1">
+            <a:schemeClr val="accent1"/>
+          </a:lnRef>
+          <a:fillRef idx="3">
+            <a:schemeClr val="accent1"/>
+          </a:fillRef>
+          <a:effectRef idx="2">
+            <a:schemeClr val="accent1"/>
+          </a:effectRef>
+          <a:fontRef idx="minor">
+            <a:schemeClr val="lt1"/>
+          </a:fontRef>
+        </p:style>
+        <p:txBody>
+          <a:bodyPr rtlCol="0" anchor="ctr"/>
+          <a:lstStyle/>
+          <a:p>
+            <a:pPr algn="ctr"/>
+          </a:p>
+        </p:txBody>
+      </p:sp>
+      <p:sp>
+        <p:nvSpPr>
+          <p:cNvPr id="7" name="Oval 6"/>
+          <p:cNvSpPr/>
+          <p:nvPr/>
+        </p:nvSpPr>
+        <p:spPr>
+          <a:xfrm>
+            <a:off x="621792" y="2941319"/>
+            <a:ext cx="310896" cy="310896"/>
+          </a:xfrm>
+          <a:prstGeom prst="ellipse">
+            <a:avLst/>
+          </a:prstGeom>
+          <a:solidFill>
+            <a:srgbClr val="009CD6"/>
+          </a:solidFill>
+          <a:ln>
+            <a:noFill/>
+          </a:ln>
+          <a:effectLst/>
+        </p:spPr>
+        <p:style>
+          <a:lnRef idx="1">
+            <a:schemeClr val="accent1"/>
+          </a:lnRef>
+          <a:fillRef idx="3">
+            <a:schemeClr val="accent1"/>
+          </a:fillRef>
+          <a:effectRef idx="2">
+            <a:schemeClr val="accent1"/>
+          </a:effectRef>
+          <a:fontRef idx="minor">
+            <a:schemeClr val="lt1"/>
+          </a:fontRef>
+        </p:style>
+        <p:txBody>
+          <a:bodyPr rtlCol="0" anchor="ctr" lIns="0" rIns="0" tIns="0" bIns="0" wrap="square"/>
+          <a:lstStyle/>
+          <a:p>
+            <a:pPr algn="ctr"/>
+            <a:r>
+              <a:rPr sz="1300" b="1" i="0">
+                <a:solidFill>
+                  <a:srgbClr val="FFFFFF"/>
+                </a:solidFill>
+                <a:latin typeface="Arial"/>
+              </a:rPr>
+              <a:t>2</a:t>
+            </a:r>
+          </a:p>
+        </p:txBody>
+      </p:sp>
+      <p:sp>
+        <p:nvSpPr>
+          <p:cNvPr id="8" name="TextBox 7"/>
+          <p:cNvSpPr txBox="1"/>
+          <p:nvPr/>
+        </p:nvSpPr>
+        <p:spPr>
+          <a:xfrm>
+            <a:off x="1115568" y="2895600"/>
+            <a:ext cx="10527487" cy="1386839"/>
+          </a:xfrm>
+          <a:prstGeom prst="rect">
+            <a:avLst/>
+          </a:prstGeom>
+          <a:noFill/>
+        </p:spPr>
+        <p:txBody>
+          <a:bodyPr wrap="square">
+            <a:spAutoFit/>
+          </a:bodyPr>
+          <a:lstStyle/>
+          <a:p>
+            <a:pPr>
+              <a:spcAft>
+                <a:spcPts val="300"/>
+              </a:spcAft>
+            </a:pPr>
+            <a:r>
+              <a:rPr sz="1900" b="1" i="0">
+                <a:solidFill>
+                  <a:srgbClr val="1A1A1A"/>
+                </a:solidFill>
+                <a:latin typeface="Arial"/>
+              </a:rPr>
+              <a:t>The relationships</a:t>
+            </a:r>
+          </a:p>
+          <a:p>
+            <a:pPr>
+              <a:spcAft>
+                <a:spcPts val="300"/>
+              </a:spcAft>
+            </a:pPr>
+            <a:r>
+              <a:rPr sz="1550" b="0" i="0">
+                <a:solidFill>
+                  <a:srgbClr val="595959"/>
+                </a:solidFill>
+                <a:latin typeface="Arial"/>
+              </a:rPr>
+              <a:t>How they connect, expressed with the shared entities.</a:t>
+            </a:r>
+          </a:p>
+        </p:txBody>
+      </p:sp>
+      <p:sp>
+        <p:nvSpPr>
+          <p:cNvPr id="9" name="Rectangle 8"/>
+          <p:cNvSpPr/>
+          <p:nvPr/>
+        </p:nvSpPr>
+        <p:spPr>
+          <a:xfrm>
+            <a:off x="621792" y="4287011"/>
+            <a:ext cx="10881360" cy="12700"/>
+          </a:xfrm>
+          <a:prstGeom prst="rect">
+            <a:avLst/>
+          </a:prstGeom>
+          <a:solidFill>
+            <a:srgbClr val="DDECF4"/>
+          </a:solidFill>
+          <a:ln>
+            <a:noFill/>
+          </a:ln>
+          <a:effectLst/>
+        </p:spPr>
+        <p:style>
+          <a:lnRef idx="1">
+            <a:schemeClr val="accent1"/>
+          </a:lnRef>
+          <a:fillRef idx="3">
+            <a:schemeClr val="accent1"/>
+          </a:fillRef>
+          <a:effectRef idx="2">
+            <a:schemeClr val="accent1"/>
+          </a:effectRef>
+          <a:fontRef idx="minor">
+            <a:schemeClr val="lt1"/>
+          </a:fontRef>
+        </p:style>
+        <p:txBody>
+          <a:bodyPr rtlCol="0" anchor="ctr"/>
+          <a:lstStyle/>
+          <a:p>
+            <a:pPr algn="ctr"/>
+          </a:p>
+        </p:txBody>
+      </p:sp>
+      <p:sp>
+        <p:nvSpPr>
+          <p:cNvPr id="10" name="Oval 9"/>
+          <p:cNvSpPr/>
+          <p:nvPr/>
+        </p:nvSpPr>
+        <p:spPr>
+          <a:xfrm>
+            <a:off x="621792" y="4373879"/>
+            <a:ext cx="310896" cy="310896"/>
+          </a:xfrm>
+          <a:prstGeom prst="ellipse">
+            <a:avLst/>
+          </a:prstGeom>
+          <a:solidFill>
+            <a:srgbClr val="009CD6"/>
+          </a:solidFill>
+          <a:ln>
+            <a:noFill/>
+          </a:ln>
+          <a:effectLst/>
+        </p:spPr>
+        <p:style>
+          <a:lnRef idx="1">
+            <a:schemeClr val="accent1"/>
+          </a:lnRef>
+          <a:fillRef idx="3">
+            <a:schemeClr val="accent1"/>
+          </a:fillRef>
+          <a:effectRef idx="2">
+            <a:schemeClr val="accent1"/>
+          </a:effectRef>
+          <a:fontRef idx="minor">
+            <a:schemeClr val="lt1"/>
+          </a:fontRef>
+        </p:style>
+        <p:txBody>
+          <a:bodyPr rtlCol="0" anchor="ctr" lIns="0" rIns="0" tIns="0" bIns="0" wrap="square"/>
+          <a:lstStyle/>
+          <a:p>
+            <a:pPr algn="ctr"/>
+            <a:r>
+              <a:rPr sz="1300" b="1" i="0">
+                <a:solidFill>
+                  <a:srgbClr val="FFFFFF"/>
+                </a:solidFill>
+                <a:latin typeface="Arial"/>
+              </a:rPr>
+              <a:t>3</a:t>
+            </a:r>
+          </a:p>
+        </p:txBody>
+      </p:sp>
+      <p:sp>
+        <p:nvSpPr>
+          <p:cNvPr id="11" name="TextBox 10"/>
+          <p:cNvSpPr txBox="1"/>
+          <p:nvPr/>
+        </p:nvSpPr>
+        <p:spPr>
+          <a:xfrm>
+            <a:off x="1115568" y="4328159"/>
+            <a:ext cx="10527487" cy="1386839"/>
+          </a:xfrm>
+          <a:prstGeom prst="rect">
+            <a:avLst/>
+          </a:prstGeom>
+          <a:noFill/>
+        </p:spPr>
+        <p:txBody>
+          <a:bodyPr wrap="square">
+            <a:spAutoFit/>
+          </a:bodyPr>
+          <a:lstStyle/>
+          <a:p>
+            <a:pPr>
+              <a:spcAft>
+                <a:spcPts val="300"/>
+              </a:spcAft>
+            </a:pPr>
+            <a:r>
+              <a:rPr sz="1900" b="1" i="0">
+                <a:solidFill>
+                  <a:srgbClr val="1A1A1A"/>
+                </a:solidFill>
+                <a:latin typeface="Arial"/>
+              </a:rPr>
+              <a:t>The decisions</a:t>
+            </a:r>
+          </a:p>
+          <a:p>
+            <a:pPr>
+              <a:spcAft>
+                <a:spcPts val="300"/>
+              </a:spcAft>
+            </a:pPr>
+            <a:r>
+              <a:rPr sz="1550" b="0" i="0">
+                <a:solidFill>
+                  <a:srgbClr val="595959"/>
+                </a:solidFill>
+                <a:latin typeface="Arial"/>
+              </a:rPr>
+              <a:t>What the EA Board ruled — and why it ruled that way.</a:t>
+            </a:r>
+          </a:p>
+        </p:txBody>
+      </p:sp>
+      <p:sp>
+        <p:nvSpPr>
+          <p:cNvPr id="12" name="TextBox 11"/>
+          <p:cNvSpPr txBox="1"/>
+          <p:nvPr/>
+        </p:nvSpPr>
+        <p:spPr>
+          <a:xfrm>
+            <a:off x="658368" y="5870448"/>
+            <a:ext cx="10881360" cy="548640"/>
+          </a:xfrm>
+          <a:prstGeom prst="rect">
+            <a:avLst/>
+          </a:prstGeom>
+          <a:noFill/>
+        </p:spPr>
+        <p:txBody>
+          <a:bodyPr wrap="square">
+            <a:spAutoFit/>
+          </a:bodyPr>
+          <a:lstStyle/>
+          <a:p>
+            <a:r>
+              <a:rPr sz="1550" b="1" i="0">
                 <a:solidFill>
                   <a:srgbClr val="006E96"/>
                 </a:solidFill>
                 <a:latin typeface="Arial"/>
               </a:rPr>
-              <a:t>One place — or effectively none.</a:t>
-            </a:r>
-          </a:p>
-        </p:txBody>
-      </p:sp>
-      <p:sp>
-        <p:nvSpPr>
-          <p:cNvPr id="7" name="TextBox 6"/>
+              <a:t>Not a building. Not a particular software product. One agreed store — one version everyone trusts.</a:t>
+            </a:r>
+          </a:p>
+        </p:txBody>
+      </p:sp>
+      <p:sp>
+        <p:nvSpPr>
+          <p:cNvPr id="13" name="TextBox 12"/>
           <p:cNvSpPr txBox="1"/>
           <p:nvPr/>
         </p:nvSpPr>
@@ -13676,21 +13202,76 @@
                 </a:solidFill>
                 <a:latin typeface="Arial"/>
               </a:rPr>
-              <a:t>What it holds, concretely — a sector anyone can look up</a:t>
-            </a:r>
-          </a:p>
-        </p:txBody>
-      </p:sp>
-      <p:sp>
-        <p:nvSpPr>
-          <p:cNvPr id="4" name="Rounded Rectangle 3"/>
+              <a:t>A second copy does not add a backup — it destroys the single source of truth</a:t>
+            </a:r>
+          </a:p>
+        </p:txBody>
+      </p:sp>
+      <p:sp>
+        <p:nvSpPr>
+          <p:cNvPr id="4" name="TextBox 3"/>
+          <p:cNvSpPr txBox="1"/>
+          <p:nvPr/>
+        </p:nvSpPr>
+        <p:spPr>
+          <a:xfrm>
+            <a:off x="658368" y="1600200"/>
+            <a:ext cx="10881360" cy="2651760"/>
+          </a:xfrm>
+          <a:prstGeom prst="rect">
+            <a:avLst/>
+          </a:prstGeom>
+          <a:noFill/>
+        </p:spPr>
+        <p:txBody>
+          <a:bodyPr wrap="square">
+            <a:spAutoFit/>
+          </a:bodyPr>
+          <a:lstStyle/>
+          <a:p>
+            <a:pPr>
+              <a:spcAft>
+                <a:spcPts val="1200"/>
+              </a:spcAft>
+            </a:pPr>
+            <a:r>
+              <a:rPr sz="2000" b="0" i="0">
+                <a:solidFill>
+                  <a:srgbClr val="1A1A1A"/>
+                </a:solidFill>
+                <a:latin typeface="Arial"/>
+              </a:rPr>
+              <a:t>The moment there are two copies, they drift. Then they disagree.</a:t>
+            </a:r>
+          </a:p>
+          <a:p>
+            <a:pPr>
+              <a:spcAft>
+                <a:spcPts val="1200"/>
+              </a:spcAft>
+            </a:pPr>
+            <a:r>
+              <a:rPr sz="2000" b="0" i="0">
+                <a:solidFill>
+                  <a:srgbClr val="1A1A1A"/>
+                </a:solidFill>
+                <a:latin typeface="Arial"/>
+              </a:rPr>
+              <a:t>One ministry works from last year’s picture; another from a newer one. People stop arguing about the architecture and start arguing about whose copy is right.</a:t>
+            </a:r>
+          </a:p>
+        </p:txBody>
+      </p:sp>
+      <p:sp>
+        <p:nvSpPr>
+          <p:cNvPr id="5" name="Rounded Rectangle 4"/>
           <p:cNvSpPr/>
           <p:nvPr/>
         </p:nvSpPr>
         <p:spPr>
           <a:xfrm>
-            <a:off x="658368" y="1536192"/>
-            <a:ext cx="5394960" cy="2011680"/>
+            <a:off x="658368" y="4434840"/>
+            <a:ext cx="10881360" cy="1325880"/>
           </a:xfrm>
           <a:prstGeom prst="roundRect">
             <a:avLst>
@@ -13729,14 +13310,14 @@
       </p:sp>
       <p:sp>
         <p:nvSpPr>
-          <p:cNvPr id="5" name="TextBox 4"/>
+          <p:cNvPr id="6" name="TextBox 5"/>
           <p:cNvSpPr txBox="1"/>
           <p:nvPr/>
         </p:nvSpPr>
         <p:spPr>
           <a:xfrm>
-            <a:off x="859536" y="1682495"/>
-            <a:ext cx="4992624" cy="1737360"/>
+            <a:off x="859536" y="4626864"/>
+            <a:ext cx="10479024" cy="1051560"/>
           </a:xfrm>
           <a:prstGeom prst="rect">
             <a:avLst/>
@@ -13755,405 +13336,20 @@
               </a:spcAft>
             </a:pPr>
             <a:r>
-              <a:rPr sz="1400" b="1" i="0">
+              <a:rPr sz="2300" b="1" i="0">
                 <a:solidFill>
                   <a:srgbClr val="006E96"/>
                 </a:solidFill>
                 <a:latin typeface="Arial"/>
               </a:rPr>
-              <a:t>DATA DOMAINS, WITH OWNERS</a:t>
-            </a:r>
-          </a:p>
-          <a:p>
-            <a:pPr>
-              <a:spcAft>
-                <a:spcPts val="700"/>
-              </a:spcAft>
-            </a:pPr>
-            <a:r>
-              <a:rPr sz="1550" b="0" i="0">
-                <a:solidFill>
-                  <a:srgbClr val="1A1A1A"/>
-                </a:solidFill>
-                <a:latin typeface="Arial"/>
-              </a:rPr>
-              <a:t>Person → the Identity Authority.</a:t>
-            </a:r>
-          </a:p>
-          <a:p>
-            <a:pPr>
-              <a:spcAft>
-                <a:spcPts val="700"/>
-              </a:spcAft>
-            </a:pPr>
-            <a:r>
-              <a:rPr sz="1550" b="0" i="0">
-                <a:solidFill>
-                  <a:srgbClr val="1A1A1A"/>
-                </a:solidFill>
-                <a:latin typeface="Arial"/>
-              </a:rPr>
-              <a:t>Learner → the Learner Registry.</a:t>
-            </a:r>
-          </a:p>
-          <a:p>
-            <a:pPr>
-              <a:spcAft>
-                <a:spcPts val="700"/>
-              </a:spcAft>
-            </a:pPr>
-            <a:r>
-              <a:rPr sz="1550" b="0" i="0">
-                <a:solidFill>
-                  <a:srgbClr val="1A1A1A"/>
-                </a:solidFill>
-                <a:latin typeface="Arial"/>
-              </a:rPr>
-              <a:t>Examination result → the Examination Authority.</a:t>
-            </a:r>
-          </a:p>
-        </p:txBody>
-      </p:sp>
-      <p:sp>
-        <p:nvSpPr>
-          <p:cNvPr id="6" name="Rounded Rectangle 5"/>
-          <p:cNvSpPr/>
-          <p:nvPr/>
-        </p:nvSpPr>
-        <p:spPr>
-          <a:xfrm>
-            <a:off x="6263640" y="1536192"/>
-            <a:ext cx="5394960" cy="2011680"/>
-          </a:xfrm>
-          <a:prstGeom prst="roundRect">
-            <a:avLst>
-              <a:gd name="adj" fmla="val 4500"/>
-            </a:avLst>
-          </a:prstGeom>
-          <a:solidFill>
-            <a:srgbClr val="E5F5FB"/>
-          </a:solidFill>
-          <a:ln>
-            <a:noFill/>
-          </a:ln>
-          <a:effectLst/>
-        </p:spPr>
-        <p:style>
-          <a:lnRef idx="1">
-            <a:schemeClr val="accent1"/>
-          </a:lnRef>
-          <a:fillRef idx="3">
-            <a:schemeClr val="accent1"/>
-          </a:fillRef>
-          <a:effectRef idx="2">
-            <a:schemeClr val="accent1"/>
-          </a:effectRef>
-          <a:fontRef idx="minor">
-            <a:schemeClr val="lt1"/>
-          </a:fontRef>
-        </p:style>
-        <p:txBody>
-          <a:bodyPr rtlCol="0" anchor="ctr"/>
-          <a:lstStyle/>
-          <a:p>
-            <a:pPr algn="ctr"/>
+              <a:t>One place — or effectively none.</a:t>
+            </a:r>
           </a:p>
         </p:txBody>
       </p:sp>
       <p:sp>
         <p:nvSpPr>
           <p:cNvPr id="7" name="TextBox 6"/>
-          <p:cNvSpPr txBox="1"/>
-          <p:nvPr/>
-        </p:nvSpPr>
-        <p:spPr>
-          <a:xfrm>
-            <a:off x="6464808" y="1682495"/>
-            <a:ext cx="4992624" cy="1737360"/>
-          </a:xfrm>
-          <a:prstGeom prst="rect">
-            <a:avLst/>
-          </a:prstGeom>
-          <a:noFill/>
-        </p:spPr>
-        <p:txBody>
-          <a:bodyPr wrap="square">
-            <a:spAutoFit/>
-          </a:bodyPr>
-          <a:lstStyle/>
-          <a:p>
-            <a:pPr>
-              <a:spcAft>
-                <a:spcPts val="700"/>
-              </a:spcAft>
-            </a:pPr>
-            <a:r>
-              <a:rPr sz="1400" b="1" i="0">
-                <a:solidFill>
-                  <a:srgbClr val="006E96"/>
-                </a:solidFill>
-                <a:latin typeface="Arial"/>
-              </a:rPr>
-              <a:t>THE CAPABILITY MAP AND PORTFOLIO</a:t>
-            </a:r>
-          </a:p>
-          <a:p>
-            <a:pPr>
-              <a:spcAft>
-                <a:spcPts val="700"/>
-              </a:spcAft>
-            </a:pPr>
-            <a:r>
-              <a:rPr sz="1550" b="0" i="0">
-                <a:solidFill>
-                  <a:srgbClr val="1A1A1A"/>
-                </a:solidFill>
-                <a:latin typeface="Arial"/>
-              </a:rPr>
-              <a:t>What the sector can do, and the system that supports each capability.</a:t>
-            </a:r>
-          </a:p>
-        </p:txBody>
-      </p:sp>
-      <p:sp>
-        <p:nvSpPr>
-          <p:cNvPr id="8" name="Rounded Rectangle 7"/>
-          <p:cNvSpPr/>
-          <p:nvPr/>
-        </p:nvSpPr>
-        <p:spPr>
-          <a:xfrm>
-            <a:off x="658368" y="3749040"/>
-            <a:ext cx="5394960" cy="2011680"/>
-          </a:xfrm>
-          <a:prstGeom prst="roundRect">
-            <a:avLst>
-              <a:gd name="adj" fmla="val 4500"/>
-            </a:avLst>
-          </a:prstGeom>
-          <a:solidFill>
-            <a:srgbClr val="E5F5FB"/>
-          </a:solidFill>
-          <a:ln>
-            <a:noFill/>
-          </a:ln>
-          <a:effectLst/>
-        </p:spPr>
-        <p:style>
-          <a:lnRef idx="1">
-            <a:schemeClr val="accent1"/>
-          </a:lnRef>
-          <a:fillRef idx="3">
-            <a:schemeClr val="accent1"/>
-          </a:fillRef>
-          <a:effectRef idx="2">
-            <a:schemeClr val="accent1"/>
-          </a:effectRef>
-          <a:fontRef idx="minor">
-            <a:schemeClr val="lt1"/>
-          </a:fontRef>
-        </p:style>
-        <p:txBody>
-          <a:bodyPr rtlCol="0" anchor="ctr"/>
-          <a:lstStyle/>
-          <a:p>
-            <a:pPr algn="ctr"/>
-          </a:p>
-        </p:txBody>
-      </p:sp>
-      <p:sp>
-        <p:nvSpPr>
-          <p:cNvPr id="9" name="TextBox 8"/>
-          <p:cNvSpPr txBox="1"/>
-          <p:nvPr/>
-        </p:nvSpPr>
-        <p:spPr>
-          <a:xfrm>
-            <a:off x="859536" y="3895344"/>
-            <a:ext cx="4992624" cy="1737360"/>
-          </a:xfrm>
-          <a:prstGeom prst="rect">
-            <a:avLst/>
-          </a:prstGeom>
-          <a:noFill/>
-        </p:spPr>
-        <p:txBody>
-          <a:bodyPr wrap="square">
-            <a:spAutoFit/>
-          </a:bodyPr>
-          <a:lstStyle/>
-          <a:p>
-            <a:pPr>
-              <a:spcAft>
-                <a:spcPts val="700"/>
-              </a:spcAft>
-            </a:pPr>
-            <a:r>
-              <a:rPr sz="1400" b="1" i="0">
-                <a:solidFill>
-                  <a:srgbClr val="006E96"/>
-                </a:solidFill>
-                <a:latin typeface="Arial"/>
-              </a:rPr>
-              <a:t>THE SHARED TECHNOLOGY</a:t>
-            </a:r>
-          </a:p>
-          <a:p>
-            <a:pPr>
-              <a:spcAft>
-                <a:spcPts val="700"/>
-              </a:spcAft>
-            </a:pPr>
-            <a:r>
-              <a:rPr sz="1550" b="0" i="0">
-                <a:solidFill>
-                  <a:srgbClr val="1A1A1A"/>
-                </a:solidFill>
-                <a:latin typeface="Arial"/>
-              </a:rPr>
-              <a:t>The platforms, standards and infrastructure all of it runs on.</a:t>
-            </a:r>
-          </a:p>
-        </p:txBody>
-      </p:sp>
-      <p:sp>
-        <p:nvSpPr>
-          <p:cNvPr id="10" name="Rounded Rectangle 9"/>
-          <p:cNvSpPr/>
-          <p:nvPr/>
-        </p:nvSpPr>
-        <p:spPr>
-          <a:xfrm>
-            <a:off x="6263640" y="3749040"/>
-            <a:ext cx="5394960" cy="2011680"/>
-          </a:xfrm>
-          <a:prstGeom prst="roundRect">
-            <a:avLst>
-              <a:gd name="adj" fmla="val 4500"/>
-            </a:avLst>
-          </a:prstGeom>
-          <a:solidFill>
-            <a:srgbClr val="E5F5FB"/>
-          </a:solidFill>
-          <a:ln>
-            <a:noFill/>
-          </a:ln>
-          <a:effectLst/>
-        </p:spPr>
-        <p:style>
-          <a:lnRef idx="1">
-            <a:schemeClr val="accent1"/>
-          </a:lnRef>
-          <a:fillRef idx="3">
-            <a:schemeClr val="accent1"/>
-          </a:fillRef>
-          <a:effectRef idx="2">
-            <a:schemeClr val="accent1"/>
-          </a:effectRef>
-          <a:fontRef idx="minor">
-            <a:schemeClr val="lt1"/>
-          </a:fontRef>
-        </p:style>
-        <p:txBody>
-          <a:bodyPr rtlCol="0" anchor="ctr"/>
-          <a:lstStyle/>
-          <a:p>
-            <a:pPr algn="ctr"/>
-          </a:p>
-        </p:txBody>
-      </p:sp>
-      <p:sp>
-        <p:nvSpPr>
-          <p:cNvPr id="11" name="TextBox 10"/>
-          <p:cNvSpPr txBox="1"/>
-          <p:nvPr/>
-        </p:nvSpPr>
-        <p:spPr>
-          <a:xfrm>
-            <a:off x="6464808" y="3895344"/>
-            <a:ext cx="4992624" cy="1737360"/>
-          </a:xfrm>
-          <a:prstGeom prst="rect">
-            <a:avLst/>
-          </a:prstGeom>
-          <a:noFill/>
-        </p:spPr>
-        <p:txBody>
-          <a:bodyPr wrap="square">
-            <a:spAutoFit/>
-          </a:bodyPr>
-          <a:lstStyle/>
-          <a:p>
-            <a:pPr>
-              <a:spcAft>
-                <a:spcPts val="700"/>
-              </a:spcAft>
-            </a:pPr>
-            <a:r>
-              <a:rPr sz="1400" b="1" i="0">
-                <a:solidFill>
-                  <a:srgbClr val="006E96"/>
-                </a:solidFill>
-                <a:latin typeface="Arial"/>
-              </a:rPr>
-              <a:t>THE DECISION LOG</a:t>
-            </a:r>
-          </a:p>
-          <a:p>
-            <a:pPr>
-              <a:spcAft>
-                <a:spcPts val="700"/>
-              </a:spcAft>
-            </a:pPr>
-            <a:r>
-              <a:rPr sz="1550" b="0" i="0">
-                <a:solidFill>
-                  <a:srgbClr val="1A1A1A"/>
-                </a:solidFill>
-                <a:latin typeface="Arial"/>
-              </a:rPr>
-              <a:t>The Board ruled that the Examination Authority must consume the Learner Registry rather than keep its own list — with the reason.</a:t>
-            </a:r>
-          </a:p>
-        </p:txBody>
-      </p:sp>
-      <p:sp>
-        <p:nvSpPr>
-          <p:cNvPr id="12" name="TextBox 11"/>
-          <p:cNvSpPr txBox="1"/>
-          <p:nvPr/>
-        </p:nvSpPr>
-        <p:spPr>
-          <a:xfrm>
-            <a:off x="658368" y="5852160"/>
-            <a:ext cx="10881360" cy="457200"/>
-          </a:xfrm>
-          <a:prstGeom prst="rect">
-            <a:avLst/>
-          </a:prstGeom>
-          <a:noFill/>
-        </p:spPr>
-        <p:txBody>
-          <a:bodyPr wrap="square">
-            <a:spAutoFit/>
-          </a:bodyPr>
-          <a:lstStyle/>
-          <a:p>
-            <a:r>
-              <a:rPr sz="1550" b="1" i="0">
-                <a:solidFill>
-                  <a:srgbClr val="006E96"/>
-                </a:solidFill>
-                <a:latin typeface="Arial"/>
-              </a:rPr>
-              <a:t>Anyone can look up not just what the architecture is, but why it is that way.</a:t>
-            </a:r>
-          </a:p>
-        </p:txBody>
-      </p:sp>
-      <p:sp>
-        <p:nvSpPr>
-          <p:cNvPr id="13" name="TextBox 12"/>
           <p:cNvSpPr txBox="1"/>
           <p:nvPr/>
         </p:nvSpPr>
@@ -14276,76 +13472,21 @@
                 </a:solidFill>
                 <a:latin typeface="Arial"/>
               </a:rPr>
-              <a:t>A spreadsheet everyone uses beats a platform nobody does</a:t>
-            </a:r>
-          </a:p>
-        </p:txBody>
-      </p:sp>
-      <p:sp>
-        <p:nvSpPr>
-          <p:cNvPr id="4" name="TextBox 3"/>
-          <p:cNvSpPr txBox="1"/>
-          <p:nvPr/>
-        </p:nvSpPr>
-        <p:spPr>
-          <a:xfrm>
-            <a:off x="658368" y="1600200"/>
-            <a:ext cx="10881360" cy="2651760"/>
-          </a:xfrm>
-          <a:prstGeom prst="rect">
-            <a:avLst/>
-          </a:prstGeom>
-          <a:noFill/>
-        </p:spPr>
-        <p:txBody>
-          <a:bodyPr wrap="square">
-            <a:spAutoFit/>
-          </a:bodyPr>
-          <a:lstStyle/>
-          <a:p>
-            <a:pPr>
-              <a:spcAft>
-                <a:spcPts val="1200"/>
-              </a:spcAft>
-            </a:pPr>
-            <a:r>
-              <a:rPr sz="2000" b="0" i="0">
-                <a:solidFill>
-                  <a:srgbClr val="1A1A1A"/>
-                </a:solidFill>
-                <a:latin typeface="Arial"/>
-              </a:rPr>
-              <a:t>You do not need to buy anything to start. A well-structured spreadsheet, or a shared wiki, is a real repository — if it holds the four layers, the relationships and the decisions, and if everyone uses it as the one source.</a:t>
-            </a:r>
-          </a:p>
-          <a:p>
-            <a:pPr>
-              <a:spcAft>
-                <a:spcPts val="1200"/>
-              </a:spcAft>
-            </a:pPr>
-            <a:r>
-              <a:rPr sz="2000" b="0" i="0">
-                <a:solidFill>
-                  <a:srgbClr val="1A1A1A"/>
-                </a:solidFill>
-                <a:latin typeface="Arial"/>
-              </a:rPr>
-              <a:t>Many countries run a perfectly good early EA on a spreadsheet and a document store. When the spreadsheet starts to hurt, you graduate — and the choice of tool is its own deliberate decision.</a:t>
-            </a:r>
-          </a:p>
-        </p:txBody>
-      </p:sp>
-      <p:sp>
-        <p:nvSpPr>
-          <p:cNvPr id="5" name="Rounded Rectangle 4"/>
+              <a:t>What it holds, concretely — a sector anyone can look up</a:t>
+            </a:r>
+          </a:p>
+        </p:txBody>
+      </p:sp>
+      <p:sp>
+        <p:nvSpPr>
+          <p:cNvPr id="4" name="Rounded Rectangle 3"/>
           <p:cNvSpPr/>
           <p:nvPr/>
         </p:nvSpPr>
         <p:spPr>
           <a:xfrm>
-            <a:off x="658368" y="4434840"/>
-            <a:ext cx="10881360" cy="1325880"/>
+            <a:off x="658368" y="1536192"/>
+            <a:ext cx="5394960" cy="2011680"/>
           </a:xfrm>
           <a:prstGeom prst="roundRect">
             <a:avLst>
@@ -14384,14 +13525,14 @@
       </p:sp>
       <p:sp>
         <p:nvSpPr>
-          <p:cNvPr id="6" name="TextBox 5"/>
+          <p:cNvPr id="5" name="TextBox 4"/>
           <p:cNvSpPr txBox="1"/>
           <p:nvPr/>
         </p:nvSpPr>
         <p:spPr>
           <a:xfrm>
-            <a:off x="859536" y="4626864"/>
-            <a:ext cx="10479024" cy="1051560"/>
+            <a:off x="859536" y="1682495"/>
+            <a:ext cx="4992624" cy="1737360"/>
           </a:xfrm>
           <a:prstGeom prst="rect">
             <a:avLst/>
@@ -14410,20 +13551,405 @@
               </a:spcAft>
             </a:pPr>
             <a:r>
-              <a:rPr sz="2300" b="1" i="0">
+              <a:rPr sz="1400" b="1" i="0">
                 <a:solidFill>
                   <a:srgbClr val="006E96"/>
                 </a:solidFill>
                 <a:latin typeface="Arial"/>
               </a:rPr>
-              <a:t>Structure matters more than software.</a:t>
-            </a:r>
+              <a:t>DATA DOMAINS, WITH OWNERS</a:t>
+            </a:r>
+          </a:p>
+          <a:p>
+            <a:pPr>
+              <a:spcAft>
+                <a:spcPts val="700"/>
+              </a:spcAft>
+            </a:pPr>
+            <a:r>
+              <a:rPr sz="1550" b="0" i="0">
+                <a:solidFill>
+                  <a:srgbClr val="1A1A1A"/>
+                </a:solidFill>
+                <a:latin typeface="Arial"/>
+              </a:rPr>
+              <a:t>Person → the Identity Authority.</a:t>
+            </a:r>
+          </a:p>
+          <a:p>
+            <a:pPr>
+              <a:spcAft>
+                <a:spcPts val="700"/>
+              </a:spcAft>
+            </a:pPr>
+            <a:r>
+              <a:rPr sz="1550" b="0" i="0">
+                <a:solidFill>
+                  <a:srgbClr val="1A1A1A"/>
+                </a:solidFill>
+                <a:latin typeface="Arial"/>
+              </a:rPr>
+              <a:t>Learner → the Learner Registry.</a:t>
+            </a:r>
+          </a:p>
+          <a:p>
+            <a:pPr>
+              <a:spcAft>
+                <a:spcPts val="700"/>
+              </a:spcAft>
+            </a:pPr>
+            <a:r>
+              <a:rPr sz="1550" b="0" i="0">
+                <a:solidFill>
+                  <a:srgbClr val="1A1A1A"/>
+                </a:solidFill>
+                <a:latin typeface="Arial"/>
+              </a:rPr>
+              <a:t>Examination result → the Examination Authority.</a:t>
+            </a:r>
+          </a:p>
+        </p:txBody>
+      </p:sp>
+      <p:sp>
+        <p:nvSpPr>
+          <p:cNvPr id="6" name="Rounded Rectangle 5"/>
+          <p:cNvSpPr/>
+          <p:nvPr/>
+        </p:nvSpPr>
+        <p:spPr>
+          <a:xfrm>
+            <a:off x="6263640" y="1536192"/>
+            <a:ext cx="5394960" cy="2011680"/>
+          </a:xfrm>
+          <a:prstGeom prst="roundRect">
+            <a:avLst>
+              <a:gd name="adj" fmla="val 4500"/>
+            </a:avLst>
+          </a:prstGeom>
+          <a:solidFill>
+            <a:srgbClr val="E5F5FB"/>
+          </a:solidFill>
+          <a:ln>
+            <a:noFill/>
+          </a:ln>
+          <a:effectLst/>
+        </p:spPr>
+        <p:style>
+          <a:lnRef idx="1">
+            <a:schemeClr val="accent1"/>
+          </a:lnRef>
+          <a:fillRef idx="3">
+            <a:schemeClr val="accent1"/>
+          </a:fillRef>
+          <a:effectRef idx="2">
+            <a:schemeClr val="accent1"/>
+          </a:effectRef>
+          <a:fontRef idx="minor">
+            <a:schemeClr val="lt1"/>
+          </a:fontRef>
+        </p:style>
+        <p:txBody>
+          <a:bodyPr rtlCol="0" anchor="ctr"/>
+          <a:lstStyle/>
+          <a:p>
+            <a:pPr algn="ctr"/>
           </a:p>
         </p:txBody>
       </p:sp>
       <p:sp>
         <p:nvSpPr>
           <p:cNvPr id="7" name="TextBox 6"/>
+          <p:cNvSpPr txBox="1"/>
+          <p:nvPr/>
+        </p:nvSpPr>
+        <p:spPr>
+          <a:xfrm>
+            <a:off x="6464808" y="1682495"/>
+            <a:ext cx="4992624" cy="1737360"/>
+          </a:xfrm>
+          <a:prstGeom prst="rect">
+            <a:avLst/>
+          </a:prstGeom>
+          <a:noFill/>
+        </p:spPr>
+        <p:txBody>
+          <a:bodyPr wrap="square">
+            <a:spAutoFit/>
+          </a:bodyPr>
+          <a:lstStyle/>
+          <a:p>
+            <a:pPr>
+              <a:spcAft>
+                <a:spcPts val="700"/>
+              </a:spcAft>
+            </a:pPr>
+            <a:r>
+              <a:rPr sz="1400" b="1" i="0">
+                <a:solidFill>
+                  <a:srgbClr val="006E96"/>
+                </a:solidFill>
+                <a:latin typeface="Arial"/>
+              </a:rPr>
+              <a:t>THE CAPABILITY MAP AND PORTFOLIO</a:t>
+            </a:r>
+          </a:p>
+          <a:p>
+            <a:pPr>
+              <a:spcAft>
+                <a:spcPts val="700"/>
+              </a:spcAft>
+            </a:pPr>
+            <a:r>
+              <a:rPr sz="1550" b="0" i="0">
+                <a:solidFill>
+                  <a:srgbClr val="1A1A1A"/>
+                </a:solidFill>
+                <a:latin typeface="Arial"/>
+              </a:rPr>
+              <a:t>What the sector can do, and the system that supports each capability.</a:t>
+            </a:r>
+          </a:p>
+        </p:txBody>
+      </p:sp>
+      <p:sp>
+        <p:nvSpPr>
+          <p:cNvPr id="8" name="Rounded Rectangle 7"/>
+          <p:cNvSpPr/>
+          <p:nvPr/>
+        </p:nvSpPr>
+        <p:spPr>
+          <a:xfrm>
+            <a:off x="658368" y="3749040"/>
+            <a:ext cx="5394960" cy="2011680"/>
+          </a:xfrm>
+          <a:prstGeom prst="roundRect">
+            <a:avLst>
+              <a:gd name="adj" fmla="val 4500"/>
+            </a:avLst>
+          </a:prstGeom>
+          <a:solidFill>
+            <a:srgbClr val="E5F5FB"/>
+          </a:solidFill>
+          <a:ln>
+            <a:noFill/>
+          </a:ln>
+          <a:effectLst/>
+        </p:spPr>
+        <p:style>
+          <a:lnRef idx="1">
+            <a:schemeClr val="accent1"/>
+          </a:lnRef>
+          <a:fillRef idx="3">
+            <a:schemeClr val="accent1"/>
+          </a:fillRef>
+          <a:effectRef idx="2">
+            <a:schemeClr val="accent1"/>
+          </a:effectRef>
+          <a:fontRef idx="minor">
+            <a:schemeClr val="lt1"/>
+          </a:fontRef>
+        </p:style>
+        <p:txBody>
+          <a:bodyPr rtlCol="0" anchor="ctr"/>
+          <a:lstStyle/>
+          <a:p>
+            <a:pPr algn="ctr"/>
+          </a:p>
+        </p:txBody>
+      </p:sp>
+      <p:sp>
+        <p:nvSpPr>
+          <p:cNvPr id="9" name="TextBox 8"/>
+          <p:cNvSpPr txBox="1"/>
+          <p:nvPr/>
+        </p:nvSpPr>
+        <p:spPr>
+          <a:xfrm>
+            <a:off x="859536" y="3895344"/>
+            <a:ext cx="4992624" cy="1737360"/>
+          </a:xfrm>
+          <a:prstGeom prst="rect">
+            <a:avLst/>
+          </a:prstGeom>
+          <a:noFill/>
+        </p:spPr>
+        <p:txBody>
+          <a:bodyPr wrap="square">
+            <a:spAutoFit/>
+          </a:bodyPr>
+          <a:lstStyle/>
+          <a:p>
+            <a:pPr>
+              <a:spcAft>
+                <a:spcPts val="700"/>
+              </a:spcAft>
+            </a:pPr>
+            <a:r>
+              <a:rPr sz="1400" b="1" i="0">
+                <a:solidFill>
+                  <a:srgbClr val="006E96"/>
+                </a:solidFill>
+                <a:latin typeface="Arial"/>
+              </a:rPr>
+              <a:t>THE SHARED TECHNOLOGY</a:t>
+            </a:r>
+          </a:p>
+          <a:p>
+            <a:pPr>
+              <a:spcAft>
+                <a:spcPts val="700"/>
+              </a:spcAft>
+            </a:pPr>
+            <a:r>
+              <a:rPr sz="1550" b="0" i="0">
+                <a:solidFill>
+                  <a:srgbClr val="1A1A1A"/>
+                </a:solidFill>
+                <a:latin typeface="Arial"/>
+              </a:rPr>
+              <a:t>The platforms, standards and infrastructure all of it runs on.</a:t>
+            </a:r>
+          </a:p>
+        </p:txBody>
+      </p:sp>
+      <p:sp>
+        <p:nvSpPr>
+          <p:cNvPr id="10" name="Rounded Rectangle 9"/>
+          <p:cNvSpPr/>
+          <p:nvPr/>
+        </p:nvSpPr>
+        <p:spPr>
+          <a:xfrm>
+            <a:off x="6263640" y="3749040"/>
+            <a:ext cx="5394960" cy="2011680"/>
+          </a:xfrm>
+          <a:prstGeom prst="roundRect">
+            <a:avLst>
+              <a:gd name="adj" fmla="val 4500"/>
+            </a:avLst>
+          </a:prstGeom>
+          <a:solidFill>
+            <a:srgbClr val="E5F5FB"/>
+          </a:solidFill>
+          <a:ln>
+            <a:noFill/>
+          </a:ln>
+          <a:effectLst/>
+        </p:spPr>
+        <p:style>
+          <a:lnRef idx="1">
+            <a:schemeClr val="accent1"/>
+          </a:lnRef>
+          <a:fillRef idx="3">
+            <a:schemeClr val="accent1"/>
+          </a:fillRef>
+          <a:effectRef idx="2">
+            <a:schemeClr val="accent1"/>
+          </a:effectRef>
+          <a:fontRef idx="minor">
+            <a:schemeClr val="lt1"/>
+          </a:fontRef>
+        </p:style>
+        <p:txBody>
+          <a:bodyPr rtlCol="0" anchor="ctr"/>
+          <a:lstStyle/>
+          <a:p>
+            <a:pPr algn="ctr"/>
+          </a:p>
+        </p:txBody>
+      </p:sp>
+      <p:sp>
+        <p:nvSpPr>
+          <p:cNvPr id="11" name="TextBox 10"/>
+          <p:cNvSpPr txBox="1"/>
+          <p:nvPr/>
+        </p:nvSpPr>
+        <p:spPr>
+          <a:xfrm>
+            <a:off x="6464808" y="3895344"/>
+            <a:ext cx="4992624" cy="1737360"/>
+          </a:xfrm>
+          <a:prstGeom prst="rect">
+            <a:avLst/>
+          </a:prstGeom>
+          <a:noFill/>
+        </p:spPr>
+        <p:txBody>
+          <a:bodyPr wrap="square">
+            <a:spAutoFit/>
+          </a:bodyPr>
+          <a:lstStyle/>
+          <a:p>
+            <a:pPr>
+              <a:spcAft>
+                <a:spcPts val="700"/>
+              </a:spcAft>
+            </a:pPr>
+            <a:r>
+              <a:rPr sz="1400" b="1" i="0">
+                <a:solidFill>
+                  <a:srgbClr val="006E96"/>
+                </a:solidFill>
+                <a:latin typeface="Arial"/>
+              </a:rPr>
+              <a:t>THE DECISION LOG</a:t>
+            </a:r>
+          </a:p>
+          <a:p>
+            <a:pPr>
+              <a:spcAft>
+                <a:spcPts val="700"/>
+              </a:spcAft>
+            </a:pPr>
+            <a:r>
+              <a:rPr sz="1550" b="0" i="0">
+                <a:solidFill>
+                  <a:srgbClr val="1A1A1A"/>
+                </a:solidFill>
+                <a:latin typeface="Arial"/>
+              </a:rPr>
+              <a:t>The Board ruled that the Examination Authority must consume the Learner Registry rather than keep its own list — with the reason.</a:t>
+            </a:r>
+          </a:p>
+        </p:txBody>
+      </p:sp>
+      <p:sp>
+        <p:nvSpPr>
+          <p:cNvPr id="12" name="TextBox 11"/>
+          <p:cNvSpPr txBox="1"/>
+          <p:nvPr/>
+        </p:nvSpPr>
+        <p:spPr>
+          <a:xfrm>
+            <a:off x="658368" y="5852160"/>
+            <a:ext cx="10881360" cy="457200"/>
+          </a:xfrm>
+          <a:prstGeom prst="rect">
+            <a:avLst/>
+          </a:prstGeom>
+          <a:noFill/>
+        </p:spPr>
+        <p:txBody>
+          <a:bodyPr wrap="square">
+            <a:spAutoFit/>
+          </a:bodyPr>
+          <a:lstStyle/>
+          <a:p>
+            <a:r>
+              <a:rPr sz="1550" b="1" i="0">
+                <a:solidFill>
+                  <a:srgbClr val="006E96"/>
+                </a:solidFill>
+                <a:latin typeface="Arial"/>
+              </a:rPr>
+              <a:t>Anyone can look up not just what the architecture is, but why it is that way.</a:t>
+            </a:r>
+          </a:p>
+        </p:txBody>
+      </p:sp>
+      <p:sp>
+        <p:nvSpPr>
+          <p:cNvPr id="13" name="TextBox 12"/>
           <p:cNvSpPr txBox="1"/>
           <p:nvPr/>
         </p:nvSpPr>
@@ -14546,7 +14072,7 @@
                 </a:solidFill>
                 <a:latin typeface="Arial"/>
               </a:rPr>
-              <a:t>The repository is the object both sides point at</a:t>
+              <a:t>A spreadsheet everyone uses beats a platform nobody does</a:t>
             </a:r>
           </a:p>
         </p:txBody>
@@ -14560,7 +14086,7 @@
         <p:spPr>
           <a:xfrm>
             <a:off x="658368" y="1600200"/>
-            <a:ext cx="10881360" cy="1600200"/>
+            <a:ext cx="10881360" cy="2651760"/>
           </a:xfrm>
           <a:prstGeom prst="rect">
             <a:avLst/>
@@ -14585,7 +14111,23 @@
                 </a:solidFill>
                 <a:latin typeface="Arial"/>
               </a:rPr>
-              <a:t>When the minister briefs cabinet and the architect designs a system, they look at the same picture — because there is only one.</a:t>
+              <a:t>You do not need to buy anything to start. A well-structured spreadsheet, or a shared wiki, is a real repository — if it holds the four layers, the relationships and the decisions, and if everyone uses it as the one source.</a:t>
+            </a:r>
+          </a:p>
+          <a:p>
+            <a:pPr>
+              <a:spcAft>
+                <a:spcPts val="1200"/>
+              </a:spcAft>
+            </a:pPr>
+            <a:r>
+              <a:rPr sz="2000" b="0" i="0">
+                <a:solidFill>
+                  <a:srgbClr val="1A1A1A"/>
+                </a:solidFill>
+                <a:latin typeface="Arial"/>
+              </a:rPr>
+              <a:t>Many countries run a perfectly good early EA on a spreadsheet and a document store. When the spreadsheet starts to hurt, you graduate — and the choice of tool is its own deliberate decision.</a:t>
             </a:r>
           </a:p>
         </p:txBody>
@@ -14598,7 +14140,7 @@
         </p:nvSpPr>
         <p:spPr>
           <a:xfrm>
-            <a:off x="658368" y="3383280"/>
+            <a:off x="658368" y="4434840"/>
             <a:ext cx="10881360" cy="1325880"/>
           </a:xfrm>
           <a:prstGeom prst="roundRect">
@@ -14644,7 +14186,7 @@
         </p:nvSpPr>
         <p:spPr>
           <a:xfrm>
-            <a:off x="859536" y="3575304"/>
+            <a:off x="859536" y="4626864"/>
             <a:ext cx="10479024" cy="1051560"/>
           </a:xfrm>
           <a:prstGeom prst="rect">
@@ -14670,7 +14212,7 @@
                 </a:solidFill>
                 <a:latin typeface="Arial"/>
               </a:rPr>
-              <a:t>The repository is what makes the architecture a shared language instead of two private ones.</a:t>
+              <a:t>Structure matters more than software.</a:t>
             </a:r>
           </a:p>
         </p:txBody>
@@ -14729,95 +14271,23 @@
       <p:grpSpPr/>
       <p:sp>
         <p:nvSpPr>
-          <p:cNvPr id="2" name="TextBox 1"/>
-          <p:cNvSpPr txBox="1"/>
+          <p:cNvPr id="2" name="Rectangle 1"/>
+          <p:cNvSpPr/>
           <p:nvPr/>
         </p:nvSpPr>
         <p:spPr>
           <a:xfrm>
-            <a:off x="1005840" y="2103120"/>
-            <a:ext cx="10149840" cy="2377440"/>
+            <a:off x="457200" y="384048"/>
+            <a:ext cx="45720" cy="256032"/>
           </a:xfrm>
           <a:prstGeom prst="rect">
             <a:avLst/>
           </a:prstGeom>
-          <a:noFill/>
-        </p:spPr>
-        <p:txBody>
-          <a:bodyPr wrap="square">
-            <a:spAutoFit/>
-          </a:bodyPr>
-          <a:lstStyle/>
-          <a:p>
-            <a:r>
-              <a:rPr sz="3000" b="1" i="0">
-                <a:solidFill>
-                  <a:srgbClr val="1A1A1A"/>
-                </a:solidFill>
-                <a:latin typeface="Arial"/>
-              </a:rPr>
-              <a:t>An EA repository is the single agreed place your architecture lives — the layers, the relationships and the decisions — so there is one picture of your government, not many.</a:t>
-            </a:r>
-          </a:p>
-        </p:txBody>
-      </p:sp>
-      <p:sp>
-        <p:nvSpPr>
-          <p:cNvPr id="3" name="TextBox 2"/>
-          <p:cNvSpPr txBox="1"/>
-          <p:nvPr/>
-        </p:nvSpPr>
-        <p:spPr>
-          <a:xfrm>
-            <a:off x="1005840" y="1554480"/>
-            <a:ext cx="5486400" cy="365760"/>
-          </a:xfrm>
-          <a:prstGeom prst="rect">
-            <a:avLst/>
-          </a:prstGeom>
-          <a:noFill/>
-        </p:spPr>
-        <p:txBody>
-          <a:bodyPr wrap="square">
-            <a:spAutoFit/>
-          </a:bodyPr>
-          <a:lstStyle/>
-          <a:p>
-            <a:r>
-              <a:rPr sz="1200" b="1" i="0">
-                <a:solidFill>
-                  <a:srgbClr val="006E96"/>
-                </a:solidFill>
-                <a:latin typeface="Arial"/>
-              </a:rPr>
-              <a:t>IN ONE SENTENCE</a:t>
-            </a:r>
-          </a:p>
-        </p:txBody>
-      </p:sp>
-      <p:sp>
-        <p:nvSpPr>
-          <p:cNvPr id="4" name="Rounded Rectangle 3"/>
-          <p:cNvSpPr/>
-          <p:nvPr/>
-        </p:nvSpPr>
-        <p:spPr>
-          <a:xfrm>
-            <a:off x="658368" y="4709160"/>
-            <a:ext cx="10881360" cy="1554480"/>
-          </a:xfrm>
-          <a:prstGeom prst="roundRect">
-            <a:avLst>
-              <a:gd name="adj" fmla="val 4500"/>
-            </a:avLst>
-          </a:prstGeom>
           <a:solidFill>
-            <a:srgbClr val="FFFFFF"/>
+            <a:srgbClr val="009CD6"/>
           </a:solidFill>
-          <a:ln w="9525">
-            <a:solidFill>
-              <a:srgbClr val="009CD6"/>
-            </a:solidFill>
+          <a:ln>
+            <a:noFill/>
           </a:ln>
           <a:effectLst/>
         </p:spPr>
@@ -14836,56 +14306,174 @@
           </a:fontRef>
         </p:style>
         <p:txBody>
-          <a:bodyPr rtlCol="0" anchor="ctr" wrap="square" lIns="228600" rIns="228600" tIns="109728" bIns="109728">
-            <a:noAutofit/>
+          <a:bodyPr rtlCol="0" anchor="ctr"/>
+          <a:lstStyle/>
+          <a:p>
+            <a:pPr algn="ctr"/>
+          </a:p>
+        </p:txBody>
+      </p:sp>
+      <p:sp>
+        <p:nvSpPr>
+          <p:cNvPr id="3" name="TextBox 2"/>
+          <p:cNvSpPr txBox="1"/>
+          <p:nvPr/>
+        </p:nvSpPr>
+        <p:spPr>
+          <a:xfrm>
+            <a:off x="621792" y="274320"/>
+            <a:ext cx="11247120" cy="914400"/>
+          </a:xfrm>
+          <a:prstGeom prst="rect">
+            <a:avLst/>
+          </a:prstGeom>
+          <a:noFill/>
+        </p:spPr>
+        <p:txBody>
+          <a:bodyPr wrap="square">
+            <a:spAutoFit/>
           </a:bodyPr>
           <a:lstStyle/>
           <a:p>
-            <a:pPr algn="l">
+            <a:r>
+              <a:rPr sz="2800" b="1" i="0">
+                <a:solidFill>
+                  <a:srgbClr val="1A1A1A"/>
+                </a:solidFill>
+                <a:latin typeface="Arial"/>
+              </a:rPr>
+              <a:t>The repository is the object both sides point at</a:t>
+            </a:r>
+          </a:p>
+        </p:txBody>
+      </p:sp>
+      <p:sp>
+        <p:nvSpPr>
+          <p:cNvPr id="4" name="TextBox 3"/>
+          <p:cNvSpPr txBox="1"/>
+          <p:nvPr/>
+        </p:nvSpPr>
+        <p:spPr>
+          <a:xfrm>
+            <a:off x="658368" y="1600200"/>
+            <a:ext cx="10881360" cy="1600200"/>
+          </a:xfrm>
+          <a:prstGeom prst="rect">
+            <a:avLst/>
+          </a:prstGeom>
+          <a:noFill/>
+        </p:spPr>
+        <p:txBody>
+          <a:bodyPr wrap="square">
+            <a:spAutoFit/>
+          </a:bodyPr>
+          <a:lstStyle/>
+          <a:p>
+            <a:pPr>
               <a:spcAft>
-                <a:spcPts val="400"/>
+                <a:spcPts val="1200"/>
               </a:spcAft>
             </a:pPr>
             <a:r>
-              <a:rPr sz="1800" b="1" i="0">
+              <a:rPr sz="2000" b="0" i="0">
+                <a:solidFill>
+                  <a:srgbClr val="1A1A1A"/>
+                </a:solidFill>
+                <a:latin typeface="Arial"/>
+              </a:rPr>
+              <a:t>When the minister briefs cabinet and the architect designs a system, they look at the same picture — because there is only one.</a:t>
+            </a:r>
+          </a:p>
+        </p:txBody>
+      </p:sp>
+      <p:sp>
+        <p:nvSpPr>
+          <p:cNvPr id="5" name="Rounded Rectangle 4"/>
+          <p:cNvSpPr/>
+          <p:nvPr/>
+        </p:nvSpPr>
+        <p:spPr>
+          <a:xfrm>
+            <a:off x="658368" y="3383280"/>
+            <a:ext cx="10881360" cy="1325880"/>
+          </a:xfrm>
+          <a:prstGeom prst="roundRect">
+            <a:avLst>
+              <a:gd name="adj" fmla="val 4500"/>
+            </a:avLst>
+          </a:prstGeom>
+          <a:solidFill>
+            <a:srgbClr val="E5F5FB"/>
+          </a:solidFill>
+          <a:ln>
+            <a:noFill/>
+          </a:ln>
+          <a:effectLst/>
+        </p:spPr>
+        <p:style>
+          <a:lnRef idx="1">
+            <a:schemeClr val="accent1"/>
+          </a:lnRef>
+          <a:fillRef idx="3">
+            <a:schemeClr val="accent1"/>
+          </a:fillRef>
+          <a:effectRef idx="2">
+            <a:schemeClr val="accent1"/>
+          </a:effectRef>
+          <a:fontRef idx="minor">
+            <a:schemeClr val="lt1"/>
+          </a:fontRef>
+        </p:style>
+        <p:txBody>
+          <a:bodyPr rtlCol="0" anchor="ctr"/>
+          <a:lstStyle/>
+          <a:p>
+            <a:pPr algn="ctr"/>
+          </a:p>
+        </p:txBody>
+      </p:sp>
+      <p:sp>
+        <p:nvSpPr>
+          <p:cNvPr id="6" name="TextBox 5"/>
+          <p:cNvSpPr txBox="1"/>
+          <p:nvPr/>
+        </p:nvSpPr>
+        <p:spPr>
+          <a:xfrm>
+            <a:off x="859536" y="3575304"/>
+            <a:ext cx="10479024" cy="1051560"/>
+          </a:xfrm>
+          <a:prstGeom prst="rect">
+            <a:avLst/>
+          </a:prstGeom>
+          <a:noFill/>
+        </p:spPr>
+        <p:txBody>
+          <a:bodyPr wrap="square">
+            <a:spAutoFit/>
+          </a:bodyPr>
+          <a:lstStyle/>
+          <a:p>
+            <a:pPr>
+              <a:spcAft>
+                <a:spcPts val="700"/>
+              </a:spcAft>
+            </a:pPr>
+            <a:r>
+              <a:rPr sz="2300" b="1" i="0">
                 <a:solidFill>
                   <a:srgbClr val="006E96"/>
                 </a:solidFill>
                 <a:latin typeface="Arial"/>
               </a:rPr>
-              <a:t>Do this on your own sector. </a:t>
-            </a:r>
-            <a:r>
-              <a:rPr sz="1800" b="1" i="0">
-                <a:solidFill>
-                  <a:srgbClr val="1A1A1A"/>
-                </a:solidFill>
-                <a:latin typeface="Arial"/>
-              </a:rPr>
-              <a:t>Design your EA repository's structure.</a:t>
-            </a:r>
-          </a:p>
-          <a:p>
-            <a:pPr algn="l">
-              <a:spcAft>
-                <a:spcPts val="400"/>
-              </a:spcAft>
-            </a:pPr>
-            <a:r>
-              <a:rPr sz="1800" b="0" i="0">
-                <a:solidFill>
-                  <a:srgbClr val="595959"/>
-                </a:solidFill>
-                <a:latin typeface="Arial"/>
-              </a:rPr>
-              <a:t>The prompt in the companion material gives you a repository schema plus single-source rules. Before the next video.</a:t>
-            </a:r>
-          </a:p>
-        </p:txBody>
-      </p:sp>
-      <p:sp>
-        <p:nvSpPr>
-          <p:cNvPr id="5" name="TextBox 4"/>
+              <a:t>The repository is what makes the architecture a shared language instead of two private ones.</a:t>
+            </a:r>
+          </a:p>
+        </p:txBody>
+      </p:sp>
+      <p:sp>
+        <p:nvSpPr>
+          <p:cNvPr id="7" name="TextBox 6"/>
           <p:cNvSpPr txBox="1"/>
           <p:nvPr/>
         </p:nvSpPr>
@@ -14913,41 +14501,6 @@
                 <a:latin typeface="Arial"/>
               </a:rPr>
               <a:t>3.1 · Set up the one place your architecture lives</a:t>
-            </a:r>
-          </a:p>
-        </p:txBody>
-      </p:sp>
-      <p:sp>
-        <p:nvSpPr>
-          <p:cNvPr id="6" name="TextBox 5"/>
-          <p:cNvSpPr txBox="1"/>
-          <p:nvPr/>
-        </p:nvSpPr>
-        <p:spPr>
-          <a:xfrm>
-            <a:off x="10058400" y="6473952"/>
-            <a:ext cx="1673352" cy="292608"/>
-          </a:xfrm>
-          <a:prstGeom prst="rect">
-            <a:avLst/>
-          </a:prstGeom>
-          <a:noFill/>
-        </p:spPr>
-        <p:txBody>
-          <a:bodyPr wrap="square">
-            <a:spAutoFit/>
-          </a:bodyPr>
-          <a:lstStyle/>
-          <a:p>
-            <a:pPr algn="r"/>
-            <a:r>
-              <a:rPr sz="900" b="0" i="0">
-                <a:solidFill>
-                  <a:srgbClr val="595959"/>
-                </a:solidFill>
-                <a:latin typeface="Arial"/>
-              </a:rPr>
-              <a:t>www.itu.int</a:t>
             </a:r>
           </a:p>
         </p:txBody>

--- a/10-Knowledge-Products/KP1-GEA/videos/module_3/en/decks/KP1_M3_3.1_Deck_v0.2.pptx
+++ b/10-Knowledge-Products/KP1-GEA/videos/module_3/en/decks/KP1_M3_3.1_Deck_v0.2.pptx
@@ -12320,7 +12320,7 @@
                 </a:solidFill>
                 <a:latin typeface="Arial"/>
               </a:rPr>
-              <a:t>~4 minutes · standalone video · voice-over on text slides</a:t>
+              <a:t>standalone video · voice-over on text slides</a:t>
             </a:r>
           </a:p>
         </p:txBody>

--- a/10-Knowledge-Products/KP1-GEA/videos/module_3/en/decks/KP1_M3_3.1_Deck_v0.2.pptx
+++ b/10-Knowledge-Products/KP1-GEA/videos/module_3/en/decks/KP1_M3_3.1_Deck_v0.2.pptx
@@ -12184,7 +12184,7 @@
                 </a:solidFill>
                 <a:latin typeface="Arial"/>
               </a:rPr>
-              <a:t>KP1 · MODULE 3 · VIDEO 3.1</a:t>
+              <a:t>MODULE 3 · VIDEO 3.1</a:t>
             </a:r>
           </a:p>
         </p:txBody>
